--- a/Documentation/Reports and Papers/Dissertation/Figures/60-sns/components/pipeline.pptx
+++ b/Documentation/Reports and Papers/Dissertation/Figures/60-sns/components/pipeline.pptx
@@ -3140,7 +3140,7 @@
         </p:nvSpPr>
         <p:spPr>
           <a:xfrm>
-            <a:off x="54000" y="198000"/>
+            <a:off x="54000" y="223200"/>
             <a:ext cx="1458000" cy="270000"/>
           </a:xfrm>
           <a:prstGeom prst="rect">
@@ -3219,7 +3219,7 @@
         </p:nvSpPr>
         <p:spPr>
           <a:xfrm>
-            <a:off x="1710000" y="198000"/>
+            <a:off x="1710000" y="223200"/>
             <a:ext cx="2178000" cy="270000"/>
           </a:xfrm>
           <a:prstGeom prst="rect">
@@ -3298,7 +3298,7 @@
         </p:nvSpPr>
         <p:spPr>
           <a:xfrm>
-            <a:off x="4086000" y="198000"/>
+            <a:off x="4086000" y="223200"/>
             <a:ext cx="2052000" cy="270000"/>
           </a:xfrm>
           <a:prstGeom prst="rect">
@@ -3966,7 +3966,7 @@
                 </a:solidFill>
                 <a:latin typeface="Arial"/>
               </a:rPr>
-              <a:t>SNS network evaluation</a:t>
+              <a:t>network evaluation</a:t>
             </a:r>
           </a:p>
         </p:txBody>
@@ -4034,7 +4034,7 @@
                 </a:solidFill>
                 <a:latin typeface="Arial"/>
               </a:rPr>
-              <a:t>per-joint valve, pressure,</a:t>
+              <a:t>valve, pressure, and</a:t>
             </a:r>
           </a:p>
           <a:p>
@@ -4046,7 +4046,7 @@
                 </a:solidFill>
                 <a:latin typeface="Arial"/>
               </a:rPr>
-              <a:t>and contact loops</a:t>
+              <a:t>contact loops</a:t>
             </a:r>
           </a:p>
         </p:txBody>
@@ -4293,8 +4293,8 @@
         </p:nvSpPr>
         <p:spPr>
           <a:xfrm>
-            <a:off x="3348000" y="1854000"/>
-            <a:ext cx="990000" cy="270000"/>
+            <a:off x="3131999" y="1854000"/>
+            <a:ext cx="827999" cy="270000"/>
           </a:xfrm>
           <a:prstGeom prst="rect">
             <a:avLst/>
@@ -4540,8 +4540,8 @@
         </p:nvSpPr>
         <p:spPr>
           <a:xfrm>
-            <a:off x="792000" y="2628000"/>
-            <a:ext cx="4500000" cy="270000"/>
+            <a:off x="108000" y="2628000"/>
+            <a:ext cx="5976000" cy="270000"/>
           </a:xfrm>
           <a:prstGeom prst="rect">
             <a:avLst/>
@@ -4562,7 +4562,19 @@
                 </a:solidFill>
                 <a:latin typeface="Arial"/>
               </a:rPr>
-              <a:t>Computer-in-the-loop: the embedded stack first executes against the simulated body, then against the physical one.</a:t>
+              <a:t>Computer-in-the-loop: the embedded stack first executes against</a:t>
+            </a:r>
+          </a:p>
+          <a:p>
+            <a:pPr algn="ctr"/>
+            <a:r>
+              <a:rPr sz="1000" b="0">
+                <a:solidFill>
+                  <a:srgbClr val="1F1F1F"/>
+                </a:solidFill>
+                <a:latin typeface="Arial"/>
+              </a:rPr>
+              <a:t>the simulated body, then against the physical one.</a:t>
             </a:r>
           </a:p>
         </p:txBody>

--- a/Documentation/Reports and Papers/Dissertation/Figures/60-sns/components/pipeline.pptx
+++ b/Documentation/Reports and Papers/Dissertation/Figures/60-sns/components/pipeline.pptx
@@ -7,7 +7,7 @@
   <p:sldIdLst>
     <p:sldId id="256" r:id="rId7"/>
   </p:sldIdLst>
-  <p:sldSz cx="6192000" cy="2736000" type="screen4x3"/>
+  <p:sldSz cx="5943600" cy="3848100" type="screen4x3"/>
   <p:notesSz cx="6858000" cy="9144000"/>
   <p:defaultTextStyle>
     <a:defPPr>
@@ -3090,22 +3090,157 @@
       <p:grpSpPr/>
       <p:sp>
         <p:nvSpPr>
-          <p:cNvPr id="2" name="Rounded Rectangle 1"/>
+          <p:cNvPr id="2" name="TextBox 1"/>
+          <p:cNvSpPr txBox="1"/>
+          <p:nvPr/>
+        </p:nvSpPr>
+        <p:spPr>
+          <a:xfrm>
+            <a:off x="127000" y="88900"/>
+            <a:ext cx="1625600" cy="228600"/>
+          </a:xfrm>
+          <a:prstGeom prst="rect">
+            <a:avLst/>
+          </a:prstGeom>
+          <a:noFill/>
+        </p:spPr>
+        <p:txBody>
+          <a:bodyPr wrap="none" lIns="0" rIns="0" tIns="0" bIns="0">
+            <a:noAutofit/>
+          </a:bodyPr>
+          <a:lstStyle/>
+          <a:p>
+            <a:pPr algn="ctr">
+              <a:lnSpc>
+                <a:spcPts val="1320"/>
+              </a:lnSpc>
+              <a:spcBef>
+                <a:spcPts val="0"/>
+              </a:spcBef>
+              <a:spcAft>
+                <a:spcPts val="0"/>
+              </a:spcAft>
+            </a:pPr>
+            <a:r>
+              <a:rPr sz="1200" b="1" i="0">
+                <a:solidFill>
+                  <a:srgbClr val="243343"/>
+                </a:solidFill>
+                <a:latin typeface="Arial"/>
+              </a:rPr>
+              <a:t>Model conversion</a:t>
+            </a:r>
+          </a:p>
+        </p:txBody>
+      </p:sp>
+      <p:sp>
+        <p:nvSpPr>
+          <p:cNvPr id="3" name="TextBox 2"/>
+          <p:cNvSpPr txBox="1"/>
+          <p:nvPr/>
+        </p:nvSpPr>
+        <p:spPr>
+          <a:xfrm>
+            <a:off x="2032000" y="88900"/>
+            <a:ext cx="1905000" cy="228600"/>
+          </a:xfrm>
+          <a:prstGeom prst="rect">
+            <a:avLst/>
+          </a:prstGeom>
+          <a:noFill/>
+        </p:spPr>
+        <p:txBody>
+          <a:bodyPr wrap="none" lIns="0" rIns="0" tIns="0" bIns="0">
+            <a:noAutofit/>
+          </a:bodyPr>
+          <a:lstStyle/>
+          <a:p>
+            <a:pPr algn="ctr">
+              <a:lnSpc>
+                <a:spcPts val="1320"/>
+              </a:lnSpc>
+              <a:spcBef>
+                <a:spcPts val="0"/>
+              </a:spcBef>
+              <a:spcAft>
+                <a:spcPts val="0"/>
+              </a:spcAft>
+            </a:pPr>
+            <a:r>
+              <a:rPr sz="1200" b="1" i="0">
+                <a:solidFill>
+                  <a:srgbClr val="243343"/>
+                </a:solidFill>
+                <a:latin typeface="Arial"/>
+              </a:rPr>
+              <a:t>Closed-loop simulation</a:t>
+            </a:r>
+          </a:p>
+        </p:txBody>
+      </p:sp>
+      <p:sp>
+        <p:nvSpPr>
+          <p:cNvPr id="4" name="TextBox 3"/>
+          <p:cNvSpPr txBox="1"/>
+          <p:nvPr/>
+        </p:nvSpPr>
+        <p:spPr>
+          <a:xfrm>
+            <a:off x="4216400" y="88900"/>
+            <a:ext cx="1600200" cy="228600"/>
+          </a:xfrm>
+          <a:prstGeom prst="rect">
+            <a:avLst/>
+          </a:prstGeom>
+          <a:noFill/>
+        </p:spPr>
+        <p:txBody>
+          <a:bodyPr wrap="none" lIns="0" rIns="0" tIns="0" bIns="0">
+            <a:noAutofit/>
+          </a:bodyPr>
+          <a:lstStyle/>
+          <a:p>
+            <a:pPr algn="ctr">
+              <a:lnSpc>
+                <a:spcPts val="1320"/>
+              </a:lnSpc>
+              <a:spcBef>
+                <a:spcPts val="0"/>
+              </a:spcBef>
+              <a:spcAft>
+                <a:spcPts val="0"/>
+              </a:spcAft>
+            </a:pPr>
+            <a:r>
+              <a:rPr sz="1200" b="1" i="0">
+                <a:solidFill>
+                  <a:srgbClr val="243343"/>
+                </a:solidFill>
+                <a:latin typeface="Arial"/>
+              </a:rPr>
+              <a:t>Future hardware</a:t>
+            </a:r>
+          </a:p>
+        </p:txBody>
+      </p:sp>
+      <p:sp>
+        <p:nvSpPr>
+          <p:cNvPr id="5" name="Rectangle 4"/>
           <p:cNvSpPr/>
           <p:nvPr/>
         </p:nvSpPr>
         <p:spPr>
           <a:xfrm>
-            <a:off x="54000" y="486000"/>
-            <a:ext cx="1458000" cy="2106000"/>
-          </a:xfrm>
-          <a:prstGeom prst="roundRect">
+            <a:off x="4216400" y="393700"/>
+            <a:ext cx="1600200" cy="2819400"/>
+          </a:xfrm>
+          <a:prstGeom prst="rect">
             <a:avLst/>
           </a:prstGeom>
           <a:noFill/>
           <a:ln w="12700">
             <a:solidFill>
-              <a:srgbClr val="8A8A8A"/>
+              <a:srgbClr val="6C7680"/>
             </a:solidFill>
             <a:prstDash val="dash"/>
           </a:ln>
@@ -3134,59 +3269,25 @@
       </p:sp>
       <p:sp>
         <p:nvSpPr>
-          <p:cNvPr id="3" name="TextBox 2"/>
-          <p:cNvSpPr txBox="1"/>
-          <p:nvPr/>
-        </p:nvSpPr>
-        <p:spPr>
-          <a:xfrm>
-            <a:off x="54000" y="223200"/>
-            <a:ext cx="1458000" cy="270000"/>
-          </a:xfrm>
-          <a:prstGeom prst="rect">
-            <a:avLst/>
-          </a:prstGeom>
-          <a:noFill/>
-        </p:spPr>
-        <p:txBody>
-          <a:bodyPr wrap="square" lIns="10800" rIns="10800" tIns="3600" bIns="3600">
-            <a:spAutoFit/>
-          </a:bodyPr>
-          <a:lstStyle/>
-          <a:p>
-            <a:pPr algn="ctr"/>
-            <a:r>
-              <a:rPr sz="1000" b="1">
-                <a:solidFill>
-                  <a:srgbClr val="1F1F1F"/>
-                </a:solidFill>
-                <a:latin typeface="Arial"/>
-              </a:rPr>
-              <a:t>Model conversion</a:t>
-            </a:r>
-          </a:p>
-        </p:txBody>
-      </p:sp>
-      <p:sp>
-        <p:nvSpPr>
-          <p:cNvPr id="4" name="Rounded Rectangle 3"/>
+          <p:cNvPr id="6" name="Rectangle 5"/>
           <p:cNvSpPr/>
           <p:nvPr/>
         </p:nvSpPr>
         <p:spPr>
           <a:xfrm>
-            <a:off x="1710000" y="486000"/>
-            <a:ext cx="2178000" cy="2106000"/>
-          </a:xfrm>
-          <a:prstGeom prst="roundRect">
-            <a:avLst/>
-          </a:prstGeom>
-          <a:noFill/>
+            <a:off x="203200" y="508000"/>
+            <a:ext cx="1473200" cy="609600"/>
+          </a:xfrm>
+          <a:prstGeom prst="rect">
+            <a:avLst/>
+          </a:prstGeom>
+          <a:solidFill>
+            <a:srgbClr val="F1F5F8"/>
+          </a:solidFill>
           <a:ln w="12700">
             <a:solidFill>
-              <a:srgbClr val="8A8A8A"/>
+              <a:srgbClr val="243343"/>
             </a:solidFill>
-            <a:prstDash val="dash"/>
           </a:ln>
         </p:spPr>
         <p:style>
@@ -3213,14 +3314,14 @@
       </p:sp>
       <p:sp>
         <p:nvSpPr>
-          <p:cNvPr id="5" name="TextBox 4"/>
+          <p:cNvPr id="7" name="TextBox 6"/>
           <p:cNvSpPr txBox="1"/>
           <p:nvPr/>
         </p:nvSpPr>
         <p:spPr>
           <a:xfrm>
-            <a:off x="1710000" y="223200"/>
-            <a:ext cx="2178000" cy="270000"/>
+            <a:off x="292100" y="633730"/>
+            <a:ext cx="1295400" cy="160654"/>
           </a:xfrm>
           <a:prstGeom prst="rect">
             <a:avLst/>
@@ -3228,44 +3329,100 @@
           <a:noFill/>
         </p:spPr>
         <p:txBody>
-          <a:bodyPr wrap="square" lIns="10800" rIns="10800" tIns="3600" bIns="3600">
-            <a:spAutoFit/>
+          <a:bodyPr wrap="none" lIns="0" rIns="0" tIns="0" bIns="0">
+            <a:noAutofit/>
           </a:bodyPr>
           <a:lstStyle/>
           <a:p>
-            <a:pPr algn="ctr"/>
-            <a:r>
-              <a:rPr sz="1000" b="1">
+            <a:pPr algn="ctr">
+              <a:lnSpc>
+                <a:spcPts val="1210"/>
+              </a:lnSpc>
+              <a:spcBef>
+                <a:spcPts val="0"/>
+              </a:spcBef>
+              <a:spcAft>
+                <a:spcPts val="0"/>
+              </a:spcAft>
+            </a:pPr>
+            <a:r>
+              <a:rPr sz="1100" b="1" i="0">
                 <a:solidFill>
-                  <a:srgbClr val="1F1F1F"/>
+                  <a:srgbClr val="243343"/>
                 </a:solidFill>
                 <a:latin typeface="Arial"/>
               </a:rPr>
-              <a:t>Closed-loop simulation</a:t>
-            </a:r>
-          </a:p>
-        </p:txBody>
-      </p:sp>
-      <p:sp>
-        <p:nvSpPr>
-          <p:cNvPr id="6" name="Rounded Rectangle 5"/>
+              <a:t>OpenSim model</a:t>
+            </a:r>
+          </a:p>
+        </p:txBody>
+      </p:sp>
+      <p:sp>
+        <p:nvSpPr>
+          <p:cNvPr id="8" name="TextBox 7"/>
+          <p:cNvSpPr txBox="1"/>
+          <p:nvPr/>
+        </p:nvSpPr>
+        <p:spPr>
+          <a:xfrm>
+            <a:off x="292100" y="850900"/>
+            <a:ext cx="1295400" cy="162052"/>
+          </a:xfrm>
+          <a:prstGeom prst="rect">
+            <a:avLst/>
+          </a:prstGeom>
+          <a:noFill/>
+        </p:spPr>
+        <p:txBody>
+          <a:bodyPr wrap="none" lIns="0" rIns="0" tIns="0" bIns="0">
+            <a:noAutofit/>
+          </a:bodyPr>
+          <a:lstStyle/>
+          <a:p>
+            <a:pPr algn="ctr">
+              <a:lnSpc>
+                <a:spcPts val="1210"/>
+              </a:lnSpc>
+              <a:spcBef>
+                <a:spcPts val="0"/>
+              </a:spcBef>
+              <a:spcAft>
+                <a:spcPts val="0"/>
+              </a:spcAft>
+            </a:pPr>
+            <a:r>
+              <a:rPr sz="1100" b="0" i="0">
+                <a:solidFill>
+                  <a:srgbClr val="243343"/>
+                </a:solidFill>
+                <a:latin typeface="Arial"/>
+              </a:rPr>
+              <a:t>Gait2392 routing</a:t>
+            </a:r>
+          </a:p>
+        </p:txBody>
+      </p:sp>
+      <p:sp>
+        <p:nvSpPr>
+          <p:cNvPr id="9" name="Rectangle 8"/>
           <p:cNvSpPr/>
           <p:nvPr/>
         </p:nvSpPr>
         <p:spPr>
           <a:xfrm>
-            <a:off x="4086000" y="486000"/>
-            <a:ext cx="2052000" cy="2106000"/>
-          </a:xfrm>
-          <a:prstGeom prst="roundRect">
-            <a:avLst/>
-          </a:prstGeom>
-          <a:noFill/>
+            <a:off x="203200" y="1435100"/>
+            <a:ext cx="1473200" cy="431800"/>
+          </a:xfrm>
+          <a:prstGeom prst="rect">
+            <a:avLst/>
+          </a:prstGeom>
+          <a:solidFill>
+            <a:srgbClr val="F1F5F8"/>
+          </a:solidFill>
           <a:ln w="12700">
             <a:solidFill>
-              <a:srgbClr val="8A8A8A"/>
+              <a:srgbClr val="243343"/>
             </a:solidFill>
-            <a:prstDash val="dash"/>
           </a:ln>
         </p:spPr>
         <p:style>
@@ -3292,14 +3449,14 @@
       </p:sp>
       <p:sp>
         <p:nvSpPr>
-          <p:cNvPr id="7" name="TextBox 6"/>
+          <p:cNvPr id="10" name="TextBox 9"/>
           <p:cNvSpPr txBox="1"/>
           <p:nvPr/>
         </p:nvSpPr>
         <p:spPr>
           <a:xfrm>
-            <a:off x="4086000" y="223200"/>
-            <a:ext cx="2052000" cy="270000"/>
+            <a:off x="292100" y="1574165"/>
+            <a:ext cx="1295400" cy="330200"/>
           </a:xfrm>
           <a:prstGeom prst="rect">
             <a:avLst/>
@@ -3307,46 +3464,54 @@
           <a:noFill/>
         </p:spPr>
         <p:txBody>
-          <a:bodyPr wrap="square" lIns="10800" rIns="10800" tIns="3600" bIns="3600">
-            <a:spAutoFit/>
+          <a:bodyPr wrap="none" lIns="0" rIns="0" tIns="0" bIns="0">
+            <a:noAutofit/>
           </a:bodyPr>
           <a:lstStyle/>
           <a:p>
-            <a:pPr algn="ctr"/>
-            <a:r>
-              <a:rPr sz="1000" b="1">
+            <a:pPr algn="ctr">
+              <a:lnSpc>
+                <a:spcPts val="1210"/>
+              </a:lnSpc>
+              <a:spcBef>
+                <a:spcPts val="0"/>
+              </a:spcBef>
+              <a:spcAft>
+                <a:spcPts val="0"/>
+              </a:spcAft>
+            </a:pPr>
+            <a:r>
+              <a:rPr sz="1100" b="0" i="0">
                 <a:solidFill>
-                  <a:srgbClr val="1F1F1F"/>
+                  <a:srgbClr val="243343"/>
                 </a:solidFill>
                 <a:latin typeface="Arial"/>
               </a:rPr>
-              <a:t>Hardware deployment</a:t>
-            </a:r>
-          </a:p>
-        </p:txBody>
-      </p:sp>
-      <p:sp>
-        <p:nvSpPr>
-          <p:cNvPr id="8" name="Rounded Rectangle 7"/>
+              <a:t>MyoConverter</a:t>
+            </a:r>
+          </a:p>
+        </p:txBody>
+      </p:sp>
+      <p:sp>
+        <p:nvSpPr>
+          <p:cNvPr id="11" name="Rectangle 10"/>
           <p:cNvSpPr/>
           <p:nvPr/>
         </p:nvSpPr>
         <p:spPr>
           <a:xfrm>
-            <a:off x="162000" y="594000"/>
-            <a:ext cx="1242000" cy="413999"/>
-          </a:xfrm>
-          <a:prstGeom prst="roundRect">
-            <a:avLst>
-              <a:gd name="adj" fmla="val 10000"/>
-            </a:avLst>
+            <a:off x="203200" y="2209800"/>
+            <a:ext cx="1473200" cy="647700"/>
+          </a:xfrm>
+          <a:prstGeom prst="rect">
+            <a:avLst/>
           </a:prstGeom>
           <a:solidFill>
-            <a:srgbClr val="F2F2F2"/>
+            <a:srgbClr val="F1F5F8"/>
           </a:solidFill>
           <a:ln w="12700">
             <a:solidFill>
-              <a:srgbClr val="1F1F1F"/>
+              <a:srgbClr val="243343"/>
             </a:solidFill>
           </a:ln>
         </p:spPr>
@@ -3365,177 +3530,144 @@
           </a:fontRef>
         </p:style>
         <p:txBody>
-          <a:bodyPr rtlCol="0" anchor="ctr" wrap="square" lIns="43200" rIns="43200" tIns="21600" bIns="21600"/>
+          <a:bodyPr rtlCol="0" anchor="ctr"/>
           <a:lstStyle/>
           <a:p>
             <a:pPr algn="ctr"/>
-            <a:r>
-              <a:rPr sz="1000">
+          </a:p>
+        </p:txBody>
+      </p:sp>
+      <p:sp>
+        <p:nvSpPr>
+          <p:cNvPr id="12" name="TextBox 11"/>
+          <p:cNvSpPr txBox="1"/>
+          <p:nvPr/>
+        </p:nvSpPr>
+        <p:spPr>
+          <a:xfrm>
+            <a:off x="292100" y="2277745"/>
+            <a:ext cx="1295400" cy="160654"/>
+          </a:xfrm>
+          <a:prstGeom prst="rect">
+            <a:avLst/>
+          </a:prstGeom>
+          <a:noFill/>
+        </p:spPr>
+        <p:txBody>
+          <a:bodyPr wrap="none" lIns="0" rIns="0" tIns="0" bIns="0">
+            <a:noAutofit/>
+          </a:bodyPr>
+          <a:lstStyle/>
+          <a:p>
+            <a:pPr algn="ctr">
+              <a:lnSpc>
+                <a:spcPts val="1210"/>
+              </a:lnSpc>
+              <a:spcBef>
+                <a:spcPts val="0"/>
+              </a:spcBef>
+              <a:spcAft>
+                <a:spcPts val="0"/>
+              </a:spcAft>
+            </a:pPr>
+            <a:r>
+              <a:rPr sz="1100" b="1" i="0">
                 <a:solidFill>
-                  <a:srgbClr val="1F1F1F"/>
+                  <a:srgbClr val="243343"/>
                 </a:solidFill>
                 <a:latin typeface="Arial"/>
               </a:rPr>
-              <a:t>OpenSim robot-body model</a:t>
-            </a:r>
-          </a:p>
-          <a:p>
-            <a:pPr algn="ctr"/>
-            <a:r>
-              <a:rPr sz="1000">
+              <a:t>MuJoCo model</a:t>
+            </a:r>
+          </a:p>
+        </p:txBody>
+      </p:sp>
+      <p:sp>
+        <p:nvSpPr>
+          <p:cNvPr id="13" name="TextBox 12"/>
+          <p:cNvSpPr txBox="1"/>
+          <p:nvPr/>
+        </p:nvSpPr>
+        <p:spPr>
+          <a:xfrm>
+            <a:off x="292100" y="2494915"/>
+            <a:ext cx="1295400" cy="324104"/>
+          </a:xfrm>
+          <a:prstGeom prst="rect">
+            <a:avLst/>
+          </a:prstGeom>
+          <a:noFill/>
+        </p:spPr>
+        <p:txBody>
+          <a:bodyPr wrap="none" lIns="0" rIns="0" tIns="0" bIns="0">
+            <a:noAutofit/>
+          </a:bodyPr>
+          <a:lstStyle/>
+          <a:p>
+            <a:pPr algn="ctr">
+              <a:lnSpc>
+                <a:spcPts val="1210"/>
+              </a:lnSpc>
+              <a:spcBef>
+                <a:spcPts val="0"/>
+              </a:spcBef>
+              <a:spcAft>
+                <a:spcPts val="0"/>
+              </a:spcAft>
+            </a:pPr>
+            <a:r>
+              <a:rPr sz="1100" b="0" i="0">
                 <a:solidFill>
-                  <a:srgbClr val="1F1F1F"/>
+                  <a:srgbClr val="243343"/>
                 </a:solidFill>
                 <a:latin typeface="Arial"/>
               </a:rPr>
-              <a:t>(.osim, Gait2392 routing)</a:t>
-            </a:r>
-          </a:p>
-        </p:txBody>
-      </p:sp>
-      <p:sp>
-        <p:nvSpPr>
-          <p:cNvPr id="9" name="Rounded Rectangle 8"/>
-          <p:cNvSpPr/>
-          <p:nvPr/>
-        </p:nvSpPr>
-        <p:spPr>
-          <a:xfrm>
-            <a:off x="162000" y="1170000"/>
-            <a:ext cx="1242000" cy="306000"/>
-          </a:xfrm>
-          <a:prstGeom prst="roundRect">
-            <a:avLst>
-              <a:gd name="adj" fmla="val 10000"/>
-            </a:avLst>
-          </a:prstGeom>
-          <a:solidFill>
-            <a:srgbClr val="F2F2F2"/>
-          </a:solidFill>
-          <a:ln w="12700">
-            <a:solidFill>
-              <a:srgbClr val="1F1F1F"/>
-            </a:solidFill>
-          </a:ln>
-        </p:spPr>
-        <p:style>
-          <a:lnRef idx="1">
-            <a:schemeClr val="accent1"/>
-          </a:lnRef>
-          <a:fillRef idx="3">
-            <a:schemeClr val="accent1"/>
-          </a:fillRef>
-          <a:effectRef idx="2">
-            <a:schemeClr val="accent1"/>
-          </a:effectRef>
-          <a:fontRef idx="minor">
-            <a:schemeClr val="lt1"/>
-          </a:fontRef>
-        </p:style>
-        <p:txBody>
-          <a:bodyPr rtlCol="0" anchor="ctr" wrap="square" lIns="43200" rIns="43200" tIns="21600" bIns="21600"/>
-          <a:lstStyle/>
-          <a:p>
-            <a:pPr algn="ctr"/>
-            <a:r>
-              <a:rPr sz="1000">
+              <a:t>MJCF; activation</a:t>
+            </a:r>
+          </a:p>
+          <a:p>
+            <a:pPr algn="ctr">
+              <a:lnSpc>
+                <a:spcPts val="1210"/>
+              </a:lnSpc>
+              <a:spcBef>
+                <a:spcPts val="0"/>
+              </a:spcBef>
+              <a:spcAft>
+                <a:spcPts val="0"/>
+              </a:spcAft>
+            </a:pPr>
+            <a:r>
+              <a:rPr sz="1100" b="0" i="0">
                 <a:solidFill>
-                  <a:srgbClr val="1F1F1F"/>
+                  <a:srgbClr val="243343"/>
                 </a:solidFill>
                 <a:latin typeface="Arial"/>
               </a:rPr>
-              <a:t>MyoConverter</a:t>
-            </a:r>
-          </a:p>
-        </p:txBody>
-      </p:sp>
-      <p:sp>
-        <p:nvSpPr>
-          <p:cNvPr id="10" name="Rounded Rectangle 9"/>
-          <p:cNvSpPr/>
-          <p:nvPr/>
-        </p:nvSpPr>
-        <p:spPr>
-          <a:xfrm>
-            <a:off x="162000" y="1782000"/>
-            <a:ext cx="1242000" cy="413999"/>
-          </a:xfrm>
-          <a:prstGeom prst="roundRect">
-            <a:avLst>
-              <a:gd name="adj" fmla="val 10000"/>
-            </a:avLst>
-          </a:prstGeom>
-          <a:solidFill>
-            <a:srgbClr val="F2F2F2"/>
-          </a:solidFill>
-          <a:ln w="12700">
-            <a:solidFill>
-              <a:srgbClr val="1F1F1F"/>
-            </a:solidFill>
-          </a:ln>
-        </p:spPr>
-        <p:style>
-          <a:lnRef idx="1">
-            <a:schemeClr val="accent1"/>
-          </a:lnRef>
-          <a:fillRef idx="3">
-            <a:schemeClr val="accent1"/>
-          </a:fillRef>
-          <a:effectRef idx="2">
-            <a:schemeClr val="accent1"/>
-          </a:effectRef>
-          <a:fontRef idx="minor">
-            <a:schemeClr val="lt1"/>
-          </a:fontRef>
-        </p:style>
-        <p:txBody>
-          <a:bodyPr rtlCol="0" anchor="ctr" wrap="square" lIns="43200" rIns="43200" tIns="21600" bIns="21600"/>
-          <a:lstStyle/>
-          <a:p>
-            <a:pPr algn="ctr"/>
-            <a:r>
-              <a:rPr sz="1000">
-                <a:solidFill>
-                  <a:srgbClr val="1F1F1F"/>
-                </a:solidFill>
-                <a:latin typeface="Arial"/>
-              </a:rPr>
-              <a:t>MuJoCo MJCF model</a:t>
-            </a:r>
-          </a:p>
-          <a:p>
-            <a:pPr algn="ctr"/>
-            <a:r>
-              <a:rPr sz="1000">
-                <a:solidFill>
-                  <a:srgbClr val="1F1F1F"/>
-                </a:solidFill>
-                <a:latin typeface="Arial"/>
-              </a:rPr>
-              <a:t>(activation-state actuators)</a:t>
+              <a:t>state actuators</a:t>
             </a:r>
           </a:p>
         </p:txBody>
       </p:sp>
       <p:cxnSp>
         <p:nvCxnSpPr>
-          <p:cNvPr id="11" name="Connector 10"/>
+          <p:cNvPr id="14" name="Connector 13"/>
           <p:cNvCxnSpPr/>
           <p:nvPr/>
         </p:nvCxnSpPr>
         <p:spPr>
           <a:xfrm>
-            <a:off x="781200" y="1007999"/>
-            <a:ext cx="0" cy="144001"/>
+            <a:off x="939800" y="1117600"/>
+            <a:ext cx="0" cy="317500"/>
           </a:xfrm>
           <a:prstGeom prst="line">
             <a:avLst/>
           </a:prstGeom>
           <a:ln w="12700">
             <a:solidFill>
-              <a:srgbClr val="1F1F1F"/>
+              <a:srgbClr val="243343"/>
             </a:solidFill>
-            <a:tailEnd type="triangle" w="med" len="med"/>
+            <a:tailEnd type="triangle" w="sm" len="sm"/>
           </a:ln>
         </p:spPr>
         <p:style>
@@ -3555,23 +3687,23 @@
       </p:cxnSp>
       <p:cxnSp>
         <p:nvCxnSpPr>
-          <p:cNvPr id="12" name="Connector 11"/>
+          <p:cNvPr id="15" name="Connector 14"/>
           <p:cNvCxnSpPr/>
           <p:nvPr/>
         </p:nvCxnSpPr>
         <p:spPr>
           <a:xfrm>
-            <a:off x="781200" y="1475999"/>
-            <a:ext cx="0" cy="288001"/>
+            <a:off x="939800" y="1866900"/>
+            <a:ext cx="0" cy="342900"/>
           </a:xfrm>
           <a:prstGeom prst="line">
             <a:avLst/>
           </a:prstGeom>
           <a:ln w="12700">
             <a:solidFill>
-              <a:srgbClr val="1F1F1F"/>
+              <a:srgbClr val="243343"/>
             </a:solidFill>
-            <a:tailEnd type="triangle" w="med" len="med"/>
+            <a:tailEnd type="triangle" w="sm" len="sm"/>
           </a:ln>
         </p:spPr>
         <p:style>
@@ -3591,26 +3723,24 @@
       </p:cxnSp>
       <p:sp>
         <p:nvSpPr>
-          <p:cNvPr id="13" name="Rounded Rectangle 12"/>
+          <p:cNvPr id="16" name="Rectangle 15"/>
           <p:cNvSpPr/>
           <p:nvPr/>
         </p:nvSpPr>
         <p:spPr>
           <a:xfrm>
-            <a:off x="1818000" y="648000"/>
-            <a:ext cx="917999" cy="486000"/>
-          </a:xfrm>
-          <a:prstGeom prst="roundRect">
-            <a:avLst>
-              <a:gd name="adj" fmla="val 10000"/>
-            </a:avLst>
+            <a:off x="2324100" y="508000"/>
+            <a:ext cx="1333500" cy="736600"/>
+          </a:xfrm>
+          <a:prstGeom prst="rect">
+            <a:avLst/>
           </a:prstGeom>
           <a:solidFill>
-            <a:srgbClr val="F2F2F2"/>
+            <a:srgbClr val="F1F5F8"/>
           </a:solidFill>
           <a:ln w="12700">
             <a:solidFill>
-              <a:srgbClr val="1F1F1F"/>
+              <a:srgbClr val="243343"/>
             </a:solidFill>
           </a:ln>
         </p:spPr>
@@ -3629,26 +3759,95 @@
           </a:fontRef>
         </p:style>
         <p:txBody>
-          <a:bodyPr rtlCol="0" anchor="ctr" wrap="square" lIns="43200" rIns="43200" tIns="21600" bIns="21600"/>
+          <a:bodyPr rtlCol="0" anchor="ctr"/>
           <a:lstStyle/>
           <a:p>
             <a:pPr algn="ctr"/>
-            <a:r>
-              <a:rPr sz="1000">
+          </a:p>
+        </p:txBody>
+      </p:sp>
+      <p:sp>
+        <p:nvSpPr>
+          <p:cNvPr id="17" name="TextBox 16"/>
+          <p:cNvSpPr txBox="1"/>
+          <p:nvPr/>
+        </p:nvSpPr>
+        <p:spPr>
+          <a:xfrm>
+            <a:off x="2413000" y="620394"/>
+            <a:ext cx="1155700" cy="160654"/>
+          </a:xfrm>
+          <a:prstGeom prst="rect">
+            <a:avLst/>
+          </a:prstGeom>
+          <a:noFill/>
+        </p:spPr>
+        <p:txBody>
+          <a:bodyPr wrap="none" lIns="0" rIns="0" tIns="0" bIns="0">
+            <a:noAutofit/>
+          </a:bodyPr>
+          <a:lstStyle/>
+          <a:p>
+            <a:pPr algn="ctr">
+              <a:lnSpc>
+                <a:spcPts val="1210"/>
+              </a:lnSpc>
+              <a:spcBef>
+                <a:spcPts val="0"/>
+              </a:spcBef>
+              <a:spcAft>
+                <a:spcPts val="0"/>
+              </a:spcAft>
+            </a:pPr>
+            <a:r>
+              <a:rPr sz="1100" b="1" i="0">
                 <a:solidFill>
-                  <a:srgbClr val="1F1F1F"/>
+                  <a:srgbClr val="243343"/>
                 </a:solidFill>
                 <a:latin typeface="Arial"/>
               </a:rPr>
-              <a:t>MuJoCo physics with</a:t>
-            </a:r>
-          </a:p>
-          <a:p>
-            <a:pPr algn="ctr"/>
-            <a:r>
-              <a:rPr sz="1000">
+              <a:t>MuJoCo physics</a:t>
+            </a:r>
+          </a:p>
+        </p:txBody>
+      </p:sp>
+      <p:sp>
+        <p:nvSpPr>
+          <p:cNvPr id="18" name="TextBox 17"/>
+          <p:cNvSpPr txBox="1"/>
+          <p:nvPr/>
+        </p:nvSpPr>
+        <p:spPr>
+          <a:xfrm>
+            <a:off x="2413000" y="837564"/>
+            <a:ext cx="1155700" cy="324104"/>
+          </a:xfrm>
+          <a:prstGeom prst="rect">
+            <a:avLst/>
+          </a:prstGeom>
+          <a:noFill/>
+        </p:spPr>
+        <p:txBody>
+          <a:bodyPr wrap="none" lIns="0" rIns="0" tIns="0" bIns="0">
+            <a:noAutofit/>
+          </a:bodyPr>
+          <a:lstStyle/>
+          <a:p>
+            <a:pPr algn="ctr">
+              <a:lnSpc>
+                <a:spcPts val="1210"/>
+              </a:lnSpc>
+              <a:spcBef>
+                <a:spcPts val="0"/>
+              </a:spcBef>
+              <a:spcAft>
+                <a:spcPts val="0"/>
+              </a:spcAft>
+            </a:pPr>
+            <a:r>
+              <a:rPr sz="1100" b="0" i="0">
                 <a:solidFill>
-                  <a:srgbClr val="1F1F1F"/>
+                  <a:srgbClr val="243343"/>
                 </a:solidFill>
                 <a:latin typeface="Arial"/>
               </a:rPr>
@@ -3656,11 +3855,21 @@
             </a:r>
           </a:p>
           <a:p>
-            <a:pPr algn="ctr"/>
-            <a:r>
-              <a:rPr sz="1000">
+            <a:pPr algn="ctr">
+              <a:lnSpc>
+                <a:spcPts val="1210"/>
+              </a:lnSpc>
+              <a:spcBef>
+                <a:spcPts val="0"/>
+              </a:spcBef>
+              <a:spcAft>
+                <a:spcPts val="0"/>
+              </a:spcAft>
+            </a:pPr>
+            <a:r>
+              <a:rPr sz="1100" b="0" i="0">
                 <a:solidFill>
-                  <a:srgbClr val="1F1F1F"/>
+                  <a:srgbClr val="243343"/>
                 </a:solidFill>
                 <a:latin typeface="Arial"/>
               </a:rPr>
@@ -3671,26 +3880,24 @@
       </p:sp>
       <p:sp>
         <p:nvSpPr>
-          <p:cNvPr id="14" name="Rounded Rectangle 13"/>
+          <p:cNvPr id="19" name="Rectangle 18"/>
           <p:cNvSpPr/>
           <p:nvPr/>
         </p:nvSpPr>
         <p:spPr>
           <a:xfrm>
-            <a:off x="1818000" y="1818000"/>
-            <a:ext cx="917999" cy="413999"/>
-          </a:xfrm>
-          <a:prstGeom prst="roundRect">
-            <a:avLst>
-              <a:gd name="adj" fmla="val 10000"/>
-            </a:avLst>
+            <a:off x="2324100" y="2374900"/>
+            <a:ext cx="1333500" cy="533400"/>
+          </a:xfrm>
+          <a:prstGeom prst="rect">
+            <a:avLst/>
           </a:prstGeom>
           <a:solidFill>
-            <a:srgbClr val="F2F2F2"/>
+            <a:srgbClr val="F1F5F8"/>
           </a:solidFill>
           <a:ln w="12700">
             <a:solidFill>
-              <a:srgbClr val="1F1F1F"/>
+              <a:srgbClr val="243343"/>
             </a:solidFill>
           </a:ln>
         </p:spPr>
@@ -3709,400 +3916,99 @@
           </a:fontRef>
         </p:style>
         <p:txBody>
-          <a:bodyPr rtlCol="0" anchor="ctr" wrap="square" lIns="43200" rIns="43200" tIns="21600" bIns="21600"/>
+          <a:bodyPr rtlCol="0" anchor="ctr"/>
           <a:lstStyle/>
           <a:p>
             <a:pPr algn="ctr"/>
-            <a:r>
-              <a:rPr sz="1000">
+          </a:p>
+        </p:txBody>
+      </p:sp>
+      <p:sp>
+        <p:nvSpPr>
+          <p:cNvPr id="20" name="TextBox 19"/>
+          <p:cNvSpPr txBox="1"/>
+          <p:nvPr/>
+        </p:nvSpPr>
+        <p:spPr>
+          <a:xfrm>
+            <a:off x="2413000" y="2462530"/>
+            <a:ext cx="1155700" cy="160654"/>
+          </a:xfrm>
+          <a:prstGeom prst="rect">
+            <a:avLst/>
+          </a:prstGeom>
+          <a:noFill/>
+        </p:spPr>
+        <p:txBody>
+          <a:bodyPr wrap="none" lIns="0" rIns="0" tIns="0" bIns="0">
+            <a:noAutofit/>
+          </a:bodyPr>
+          <a:lstStyle/>
+          <a:p>
+            <a:pPr algn="ctr">
+              <a:lnSpc>
+                <a:spcPts val="1210"/>
+              </a:lnSpc>
+              <a:spcBef>
+                <a:spcPts val="0"/>
+              </a:spcBef>
+              <a:spcAft>
+                <a:spcPts val="0"/>
+              </a:spcAft>
+            </a:pPr>
+            <a:r>
+              <a:rPr sz="1100" b="1" i="0">
                 <a:solidFill>
-                  <a:srgbClr val="1F1F1F"/>
+                  <a:srgbClr val="243343"/>
                 </a:solidFill>
                 <a:latin typeface="Arial"/>
               </a:rPr>
               <a:t>SNS-Toolbox</a:t>
             </a:r>
           </a:p>
-          <a:p>
-            <a:pPr algn="ctr"/>
-            <a:r>
-              <a:rPr sz="1000">
+        </p:txBody>
+      </p:sp>
+      <p:sp>
+        <p:nvSpPr>
+          <p:cNvPr id="21" name="TextBox 20"/>
+          <p:cNvSpPr txBox="1"/>
+          <p:nvPr/>
+        </p:nvSpPr>
+        <p:spPr>
+          <a:xfrm>
+            <a:off x="2413000" y="2679700"/>
+            <a:ext cx="1155700" cy="162052"/>
+          </a:xfrm>
+          <a:prstGeom prst="rect">
+            <a:avLst/>
+          </a:prstGeom>
+          <a:noFill/>
+        </p:spPr>
+        <p:txBody>
+          <a:bodyPr wrap="none" lIns="0" rIns="0" tIns="0" bIns="0">
+            <a:noAutofit/>
+          </a:bodyPr>
+          <a:lstStyle/>
+          <a:p>
+            <a:pPr algn="ctr">
+              <a:lnSpc>
+                <a:spcPts val="1210"/>
+              </a:lnSpc>
+              <a:spcBef>
+                <a:spcPts val="0"/>
+              </a:spcBef>
+              <a:spcAft>
+                <a:spcPts val="0"/>
+              </a:spcAft>
+            </a:pPr>
+            <a:r>
+              <a:rPr sz="1100" b="0" i="0">
                 <a:solidFill>
-                  <a:srgbClr val="1F1F1F"/>
+                  <a:srgbClr val="243343"/>
                 </a:solidFill>
                 <a:latin typeface="Arial"/>
               </a:rPr>
-              <a:t>network (Python)</a:t>
-            </a:r>
-          </a:p>
-        </p:txBody>
-      </p:sp>
-      <p:cxnSp>
-        <p:nvCxnSpPr>
-          <p:cNvPr id="15" name="Connector 14"/>
-          <p:cNvCxnSpPr/>
-          <p:nvPr/>
-        </p:nvCxnSpPr>
-        <p:spPr>
-          <a:xfrm flipV="1">
-            <a:off x="1998000" y="1152000"/>
-            <a:ext cx="0" cy="648000"/>
-          </a:xfrm>
-          <a:prstGeom prst="line">
-            <a:avLst/>
-          </a:prstGeom>
-          <a:ln w="12700">
-            <a:solidFill>
-              <a:srgbClr val="1F1F1F"/>
-            </a:solidFill>
-            <a:tailEnd type="triangle" w="med" len="med"/>
-          </a:ln>
-        </p:spPr>
-        <p:style>
-          <a:lnRef idx="2">
-            <a:schemeClr val="accent1"/>
-          </a:lnRef>
-          <a:fillRef idx="0">
-            <a:schemeClr val="accent1"/>
-          </a:fillRef>
-          <a:effectRef idx="1">
-            <a:schemeClr val="accent1"/>
-          </a:effectRef>
-          <a:fontRef idx="minor">
-            <a:schemeClr val="tx1"/>
-          </a:fontRef>
-        </p:style>
-      </p:cxnSp>
-      <p:sp>
-        <p:nvSpPr>
-          <p:cNvPr id="16" name="TextBox 15"/>
-          <p:cNvSpPr txBox="1"/>
-          <p:nvPr/>
-        </p:nvSpPr>
-        <p:spPr>
-          <a:xfrm>
-            <a:off x="1278000" y="1339200"/>
-            <a:ext cx="702000" cy="270000"/>
-          </a:xfrm>
-          <a:prstGeom prst="rect">
-            <a:avLst/>
-          </a:prstGeom>
-          <a:noFill/>
-        </p:spPr>
-        <p:txBody>
-          <a:bodyPr wrap="square" lIns="10800" rIns="10800" tIns="3600" bIns="3600">
-            <a:spAutoFit/>
-          </a:bodyPr>
-          <a:lstStyle/>
-          <a:p>
-            <a:pPr algn="r"/>
-            <a:r>
-              <a:rPr sz="1000" b="0">
-                <a:solidFill>
-                  <a:srgbClr val="1F1F1F"/>
-                </a:solidFill>
-                <a:latin typeface="Arial"/>
-              </a:rPr>
-              <a:t>per-muscle</a:t>
-            </a:r>
-          </a:p>
-          <a:p>
-            <a:pPr algn="r"/>
-            <a:r>
-              <a:rPr sz="1000" b="0">
-                <a:solidFill>
-                  <a:srgbClr val="1F1F1F"/>
-                </a:solidFill>
-                <a:latin typeface="Arial"/>
-              </a:rPr>
-              <a:t>activation</a:t>
-            </a:r>
-          </a:p>
-        </p:txBody>
-      </p:sp>
-      <p:cxnSp>
-        <p:nvCxnSpPr>
-          <p:cNvPr id="17" name="Connector 16"/>
-          <p:cNvCxnSpPr/>
-          <p:nvPr/>
-        </p:nvCxnSpPr>
-        <p:spPr>
-          <a:xfrm>
-            <a:off x="2628000" y="1152000"/>
-            <a:ext cx="0" cy="648000"/>
-          </a:xfrm>
-          <a:prstGeom prst="line">
-            <a:avLst/>
-          </a:prstGeom>
-          <a:ln w="12700">
-            <a:solidFill>
-              <a:srgbClr val="1F1F1F"/>
-            </a:solidFill>
-            <a:tailEnd type="triangle" w="med" len="med"/>
-          </a:ln>
-        </p:spPr>
-        <p:style>
-          <a:lnRef idx="2">
-            <a:schemeClr val="accent1"/>
-          </a:lnRef>
-          <a:fillRef idx="0">
-            <a:schemeClr val="accent1"/>
-          </a:fillRef>
-          <a:effectRef idx="1">
-            <a:schemeClr val="accent1"/>
-          </a:effectRef>
-          <a:fontRef idx="minor">
-            <a:schemeClr val="tx1"/>
-          </a:fontRef>
-        </p:style>
-      </p:cxnSp>
-      <p:sp>
-        <p:nvSpPr>
-          <p:cNvPr id="18" name="TextBox 17"/>
-          <p:cNvSpPr txBox="1"/>
-          <p:nvPr/>
-        </p:nvSpPr>
-        <p:spPr>
-          <a:xfrm>
-            <a:off x="2664000" y="1339200"/>
-            <a:ext cx="1188000" cy="270000"/>
-          </a:xfrm>
-          <a:prstGeom prst="rect">
-            <a:avLst/>
-          </a:prstGeom>
-          <a:noFill/>
-        </p:spPr>
-        <p:txBody>
-          <a:bodyPr wrap="square" lIns="10800" rIns="10800" tIns="3600" bIns="3600">
-            <a:spAutoFit/>
-          </a:bodyPr>
-          <a:lstStyle/>
-          <a:p>
-            <a:pPr algn="l"/>
-            <a:r>
-              <a:rPr sz="1000" b="0">
-                <a:solidFill>
-                  <a:srgbClr val="1F1F1F"/>
-                </a:solidFill>
-                <a:latin typeface="Arial"/>
-              </a:rPr>
-              <a:t>Ia, Ib, and II afferents;</a:t>
-            </a:r>
-          </a:p>
-          <a:p>
-            <a:pPr algn="l"/>
-            <a:r>
-              <a:rPr sz="1000" b="0">
-                <a:solidFill>
-                  <a:srgbClr val="1F1F1F"/>
-                </a:solidFill>
-                <a:latin typeface="Arial"/>
-              </a:rPr>
-              <a:t>heel and toe contact</a:t>
-            </a:r>
-          </a:p>
-        </p:txBody>
-      </p:sp>
-      <p:sp>
-        <p:nvSpPr>
-          <p:cNvPr id="19" name="Rounded Rectangle 18"/>
-          <p:cNvSpPr/>
-          <p:nvPr/>
-        </p:nvSpPr>
-        <p:spPr>
-          <a:xfrm>
-            <a:off x="4194000" y="594000"/>
-            <a:ext cx="1494000" cy="378000"/>
-          </a:xfrm>
-          <a:prstGeom prst="roundRect">
-            <a:avLst>
-              <a:gd name="adj" fmla="val 10000"/>
-            </a:avLst>
-          </a:prstGeom>
-          <a:solidFill>
-            <a:srgbClr val="F2F2F2"/>
-          </a:solidFill>
-          <a:ln w="12700">
-            <a:solidFill>
-              <a:srgbClr val="1F1F1F"/>
-            </a:solidFill>
-          </a:ln>
-        </p:spPr>
-        <p:style>
-          <a:lnRef idx="1">
-            <a:schemeClr val="accent1"/>
-          </a:lnRef>
-          <a:fillRef idx="3">
-            <a:schemeClr val="accent1"/>
-          </a:fillRef>
-          <a:effectRef idx="2">
-            <a:schemeClr val="accent1"/>
-          </a:effectRef>
-          <a:fontRef idx="minor">
-            <a:schemeClr val="lt1"/>
-          </a:fontRef>
-        </p:style>
-        <p:txBody>
-          <a:bodyPr rtlCol="0" anchor="ctr" wrap="square" lIns="43200" rIns="43200" tIns="21600" bIns="21600"/>
-          <a:lstStyle/>
-          <a:p>
-            <a:pPr algn="ctr"/>
-            <a:r>
-              <a:rPr sz="1000">
-                <a:solidFill>
-                  <a:srgbClr val="1F1F1F"/>
-                </a:solidFill>
-                <a:latin typeface="Arial"/>
-              </a:rPr>
-              <a:t>Jetson Orin:</a:t>
-            </a:r>
-          </a:p>
-          <a:p>
-            <a:pPr algn="ctr"/>
-            <a:r>
-              <a:rPr sz="1000">
-                <a:solidFill>
-                  <a:srgbClr val="1F1F1F"/>
-                </a:solidFill>
-                <a:latin typeface="Arial"/>
-              </a:rPr>
-              <a:t>network evaluation</a:t>
-            </a:r>
-          </a:p>
-        </p:txBody>
-      </p:sp>
-      <p:sp>
-        <p:nvSpPr>
-          <p:cNvPr id="20" name="Rounded Rectangle 19"/>
-          <p:cNvSpPr/>
-          <p:nvPr/>
-        </p:nvSpPr>
-        <p:spPr>
-          <a:xfrm>
-            <a:off x="4194000" y="1278000"/>
-            <a:ext cx="1494000" cy="522000"/>
-          </a:xfrm>
-          <a:prstGeom prst="roundRect">
-            <a:avLst>
-              <a:gd name="adj" fmla="val 10000"/>
-            </a:avLst>
-          </a:prstGeom>
-          <a:solidFill>
-            <a:srgbClr val="F2F2F2"/>
-          </a:solidFill>
-          <a:ln w="12700">
-            <a:solidFill>
-              <a:srgbClr val="1F1F1F"/>
-            </a:solidFill>
-          </a:ln>
-        </p:spPr>
-        <p:style>
-          <a:lnRef idx="1">
-            <a:schemeClr val="accent1"/>
-          </a:lnRef>
-          <a:fillRef idx="3">
-            <a:schemeClr val="accent1"/>
-          </a:fillRef>
-          <a:effectRef idx="2">
-            <a:schemeClr val="accent1"/>
-          </a:effectRef>
-          <a:fontRef idx="minor">
-            <a:schemeClr val="lt1"/>
-          </a:fontRef>
-        </p:style>
-        <p:txBody>
-          <a:bodyPr rtlCol="0" anchor="ctr" wrap="square" lIns="43200" rIns="43200" tIns="21600" bIns="21600"/>
-          <a:lstStyle/>
-          <a:p>
-            <a:pPr algn="ctr"/>
-            <a:r>
-              <a:rPr sz="1000">
-                <a:solidFill>
-                  <a:srgbClr val="1F1F1F"/>
-                </a:solidFill>
-                <a:latin typeface="Arial"/>
-              </a:rPr>
-              <a:t>Teensy-class MCUs:</a:t>
-            </a:r>
-          </a:p>
-          <a:p>
-            <a:pPr algn="ctr"/>
-            <a:r>
-              <a:rPr sz="1000">
-                <a:solidFill>
-                  <a:srgbClr val="1F1F1F"/>
-                </a:solidFill>
-                <a:latin typeface="Arial"/>
-              </a:rPr>
-              <a:t>valve, pressure, and</a:t>
-            </a:r>
-          </a:p>
-          <a:p>
-            <a:pPr algn="ctr"/>
-            <a:r>
-              <a:rPr sz="1000">
-                <a:solidFill>
-                  <a:srgbClr val="1F1F1F"/>
-                </a:solidFill>
-                <a:latin typeface="Arial"/>
-              </a:rPr>
-              <a:t>contact loops</a:t>
-            </a:r>
-          </a:p>
-        </p:txBody>
-      </p:sp>
-      <p:sp>
-        <p:nvSpPr>
-          <p:cNvPr id="21" name="Rounded Rectangle 20"/>
-          <p:cNvSpPr/>
-          <p:nvPr/>
-        </p:nvSpPr>
-        <p:spPr>
-          <a:xfrm>
-            <a:off x="4194000" y="2106000"/>
-            <a:ext cx="1494000" cy="360000"/>
-          </a:xfrm>
-          <a:prstGeom prst="roundRect">
-            <a:avLst>
-              <a:gd name="adj" fmla="val 10000"/>
-            </a:avLst>
-          </a:prstGeom>
-          <a:solidFill>
-            <a:srgbClr val="F2F2F2"/>
-          </a:solidFill>
-          <a:ln w="12700">
-            <a:solidFill>
-              <a:srgbClr val="1F1F1F"/>
-            </a:solidFill>
-          </a:ln>
-        </p:spPr>
-        <p:style>
-          <a:lnRef idx="1">
-            <a:schemeClr val="accent1"/>
-          </a:lnRef>
-          <a:fillRef idx="3">
-            <a:schemeClr val="accent1"/>
-          </a:fillRef>
-          <a:effectRef idx="2">
-            <a:schemeClr val="accent1"/>
-          </a:effectRef>
-          <a:fontRef idx="minor">
-            <a:schemeClr val="lt1"/>
-          </a:fontRef>
-        </p:style>
-        <p:txBody>
-          <a:bodyPr rtlCol="0" anchor="ctr" wrap="square" lIns="43200" rIns="43200" tIns="21600" bIns="21600"/>
-          <a:lstStyle/>
-          <a:p>
-            <a:pPr algn="ctr"/>
-            <a:r>
-              <a:rPr sz="1000">
-                <a:solidFill>
-                  <a:srgbClr val="1F1F1F"/>
-                </a:solidFill>
-                <a:latin typeface="Arial"/>
-              </a:rPr>
-              <a:t>Treadmill biped</a:t>
+              <a:t>Neural controller</a:t>
             </a:r>
           </a:p>
         </p:txBody>
@@ -4115,228 +4021,15 @@
         </p:nvCxnSpPr>
         <p:spPr>
           <a:xfrm>
-            <a:off x="4932000" y="972000"/>
-            <a:ext cx="0" cy="288000"/>
+            <a:off x="1676400" y="2527300"/>
+            <a:ext cx="228600" cy="0"/>
           </a:xfrm>
           <a:prstGeom prst="line">
             <a:avLst/>
           </a:prstGeom>
           <a:ln w="12700">
             <a:solidFill>
-              <a:srgbClr val="1F1F1F"/>
-            </a:solidFill>
-            <a:tailEnd type="triangle" w="med" len="med"/>
-          </a:ln>
-        </p:spPr>
-        <p:style>
-          <a:lnRef idx="2">
-            <a:schemeClr val="accent1"/>
-          </a:lnRef>
-          <a:fillRef idx="0">
-            <a:schemeClr val="accent1"/>
-          </a:fillRef>
-          <a:effectRef idx="1">
-            <a:schemeClr val="accent1"/>
-          </a:effectRef>
-          <a:fontRef idx="minor">
-            <a:schemeClr val="tx1"/>
-          </a:fontRef>
-        </p:style>
-      </p:cxnSp>
-      <p:sp>
-        <p:nvSpPr>
-          <p:cNvPr id="23" name="TextBox 22"/>
-          <p:cNvSpPr txBox="1"/>
-          <p:nvPr/>
-        </p:nvSpPr>
-        <p:spPr>
-          <a:xfrm>
-            <a:off x="4986000" y="1026000"/>
-            <a:ext cx="1188000" cy="270000"/>
-          </a:xfrm>
-          <a:prstGeom prst="rect">
-            <a:avLst/>
-          </a:prstGeom>
-          <a:noFill/>
-        </p:spPr>
-        <p:txBody>
-          <a:bodyPr wrap="square" lIns="10800" rIns="10800" tIns="3600" bIns="3600">
-            <a:spAutoFit/>
-          </a:bodyPr>
-          <a:lstStyle/>
-          <a:p>
-            <a:pPr algn="l"/>
-            <a:r>
-              <a:rPr sz="1000" b="0">
-                <a:solidFill>
-                  <a:srgbClr val="1F1F1F"/>
-                </a:solidFill>
-                <a:latin typeface="Arial"/>
-              </a:rPr>
-              <a:t>commands</a:t>
-            </a:r>
-          </a:p>
-        </p:txBody>
-      </p:sp>
-      <p:cxnSp>
-        <p:nvCxnSpPr>
-          <p:cNvPr id="24" name="Connector 23"/>
-          <p:cNvCxnSpPr/>
-          <p:nvPr/>
-        </p:nvCxnSpPr>
-        <p:spPr>
-          <a:xfrm>
-            <a:off x="4932000" y="1800000"/>
-            <a:ext cx="0" cy="288000"/>
-          </a:xfrm>
-          <a:prstGeom prst="line">
-            <a:avLst/>
-          </a:prstGeom>
-          <a:ln w="12700">
-            <a:solidFill>
-              <a:srgbClr val="1F1F1F"/>
-            </a:solidFill>
-            <a:tailEnd type="triangle" w="med" len="med"/>
-          </a:ln>
-        </p:spPr>
-        <p:style>
-          <a:lnRef idx="2">
-            <a:schemeClr val="accent1"/>
-          </a:lnRef>
-          <a:fillRef idx="0">
-            <a:schemeClr val="accent1"/>
-          </a:fillRef>
-          <a:effectRef idx="1">
-            <a:schemeClr val="accent1"/>
-          </a:effectRef>
-          <a:fontRef idx="minor">
-            <a:schemeClr val="tx1"/>
-          </a:fontRef>
-        </p:style>
-      </p:cxnSp>
-      <p:sp>
-        <p:nvSpPr>
-          <p:cNvPr id="25" name="TextBox 24"/>
-          <p:cNvSpPr txBox="1"/>
-          <p:nvPr/>
-        </p:nvSpPr>
-        <p:spPr>
-          <a:xfrm>
-            <a:off x="4986000" y="1854000"/>
-            <a:ext cx="1188000" cy="270000"/>
-          </a:xfrm>
-          <a:prstGeom prst="rect">
-            <a:avLst/>
-          </a:prstGeom>
-          <a:noFill/>
-        </p:spPr>
-        <p:txBody>
-          <a:bodyPr wrap="square" lIns="10800" rIns="10800" tIns="3600" bIns="3600">
-            <a:spAutoFit/>
-          </a:bodyPr>
-          <a:lstStyle/>
-          <a:p>
-            <a:pPr algn="l"/>
-            <a:r>
-              <a:rPr sz="1000" b="0">
-                <a:solidFill>
-                  <a:srgbClr val="1F1F1F"/>
-                </a:solidFill>
-                <a:latin typeface="Arial"/>
-              </a:rPr>
-              <a:t>valve drive</a:t>
-            </a:r>
-          </a:p>
-        </p:txBody>
-      </p:sp>
-      <p:cxnSp>
-        <p:nvCxnSpPr>
-          <p:cNvPr id="26" name="Connector 25"/>
-          <p:cNvCxnSpPr/>
-          <p:nvPr/>
-        </p:nvCxnSpPr>
-        <p:spPr>
-          <a:xfrm flipV="1">
-            <a:off x="4374000" y="1807199"/>
-            <a:ext cx="0" cy="280801"/>
-          </a:xfrm>
-          <a:prstGeom prst="line">
-            <a:avLst/>
-          </a:prstGeom>
-          <a:ln w="12700">
-            <a:solidFill>
-              <a:srgbClr val="1F1F1F"/>
-            </a:solidFill>
-            <a:tailEnd type="triangle" w="med" len="med"/>
-          </a:ln>
-        </p:spPr>
-        <p:style>
-          <a:lnRef idx="2">
-            <a:schemeClr val="accent1"/>
-          </a:lnRef>
-          <a:fillRef idx="0">
-            <a:schemeClr val="accent1"/>
-          </a:fillRef>
-          <a:effectRef idx="1">
-            <a:schemeClr val="accent1"/>
-          </a:effectRef>
-          <a:fontRef idx="minor">
-            <a:schemeClr val="tx1"/>
-          </a:fontRef>
-        </p:style>
-      </p:cxnSp>
-      <p:sp>
-        <p:nvSpPr>
-          <p:cNvPr id="27" name="TextBox 26"/>
-          <p:cNvSpPr txBox="1"/>
-          <p:nvPr/>
-        </p:nvSpPr>
-        <p:spPr>
-          <a:xfrm>
-            <a:off x="3131999" y="1854000"/>
-            <a:ext cx="827999" cy="270000"/>
-          </a:xfrm>
-          <a:prstGeom prst="rect">
-            <a:avLst/>
-          </a:prstGeom>
-          <a:noFill/>
-        </p:spPr>
-        <p:txBody>
-          <a:bodyPr wrap="square" lIns="10800" rIns="10800" tIns="3600" bIns="3600">
-            <a:spAutoFit/>
-          </a:bodyPr>
-          <a:lstStyle/>
-          <a:p>
-            <a:pPr algn="r"/>
-            <a:r>
-              <a:rPr sz="1000" b="0">
-                <a:solidFill>
-                  <a:srgbClr val="1F1F1F"/>
-                </a:solidFill>
-                <a:latin typeface="Arial"/>
-              </a:rPr>
-              <a:t>sensors</a:t>
-            </a:r>
-          </a:p>
-        </p:txBody>
-      </p:sp>
-      <p:cxnSp>
-        <p:nvCxnSpPr>
-          <p:cNvPr id="28" name="Connector 27"/>
-          <p:cNvCxnSpPr/>
-          <p:nvPr/>
-        </p:nvCxnSpPr>
-        <p:spPr>
-          <a:xfrm>
-            <a:off x="1404000" y="1987199"/>
-            <a:ext cx="198000" cy="0"/>
-          </a:xfrm>
-          <a:prstGeom prst="line">
-            <a:avLst/>
-          </a:prstGeom>
-          <a:ln w="12700">
-            <a:solidFill>
-              <a:srgbClr val="1F1F1F"/>
+              <a:srgbClr val="243343"/>
             </a:solidFill>
           </a:ln>
         </p:spPr>
@@ -4357,21 +4050,21 @@
       </p:cxnSp>
       <p:cxnSp>
         <p:nvCxnSpPr>
-          <p:cNvPr id="29" name="Connector 28"/>
+          <p:cNvPr id="23" name="Connector 22"/>
           <p:cNvCxnSpPr/>
           <p:nvPr/>
         </p:nvCxnSpPr>
         <p:spPr>
           <a:xfrm flipV="1">
-            <a:off x="1602000" y="892800"/>
-            <a:ext cx="0" cy="1094399"/>
+            <a:off x="1905000" y="863600"/>
+            <a:ext cx="0" cy="1663700"/>
           </a:xfrm>
           <a:prstGeom prst="line">
             <a:avLst/>
           </a:prstGeom>
           <a:ln w="12700">
             <a:solidFill>
-              <a:srgbClr val="1F1F1F"/>
+              <a:srgbClr val="243343"/>
             </a:solidFill>
           </a:ln>
         </p:spPr>
@@ -4392,23 +4085,266 @@
       </p:cxnSp>
       <p:cxnSp>
         <p:nvCxnSpPr>
+          <p:cNvPr id="24" name="Connector 23"/>
+          <p:cNvCxnSpPr/>
+          <p:nvPr/>
+        </p:nvCxnSpPr>
+        <p:spPr>
+          <a:xfrm>
+            <a:off x="1905000" y="863600"/>
+            <a:ext cx="419100" cy="0"/>
+          </a:xfrm>
+          <a:prstGeom prst="line">
+            <a:avLst/>
+          </a:prstGeom>
+          <a:ln w="12700">
+            <a:solidFill>
+              <a:srgbClr val="243343"/>
+            </a:solidFill>
+            <a:tailEnd type="triangle" w="sm" len="sm"/>
+          </a:ln>
+        </p:spPr>
+        <p:style>
+          <a:lnRef idx="2">
+            <a:schemeClr val="accent1"/>
+          </a:lnRef>
+          <a:fillRef idx="0">
+            <a:schemeClr val="accent1"/>
+          </a:fillRef>
+          <a:effectRef idx="1">
+            <a:schemeClr val="accent1"/>
+          </a:effectRef>
+          <a:fontRef idx="minor">
+            <a:schemeClr val="tx1"/>
+          </a:fontRef>
+        </p:style>
+      </p:cxnSp>
+      <p:cxnSp>
+        <p:nvCxnSpPr>
+          <p:cNvPr id="25" name="Connector 24"/>
+          <p:cNvCxnSpPr/>
+          <p:nvPr/>
+        </p:nvCxnSpPr>
+        <p:spPr>
+          <a:xfrm flipH="1">
+            <a:off x="2146300" y="2641600"/>
+            <a:ext cx="177800" cy="0"/>
+          </a:xfrm>
+          <a:prstGeom prst="line">
+            <a:avLst/>
+          </a:prstGeom>
+          <a:ln w="12700">
+            <a:solidFill>
+              <a:srgbClr val="0072B2"/>
+            </a:solidFill>
+          </a:ln>
+        </p:spPr>
+        <p:style>
+          <a:lnRef idx="2">
+            <a:schemeClr val="accent1"/>
+          </a:lnRef>
+          <a:fillRef idx="0">
+            <a:schemeClr val="accent1"/>
+          </a:fillRef>
+          <a:effectRef idx="1">
+            <a:schemeClr val="accent1"/>
+          </a:effectRef>
+          <a:fontRef idx="minor">
+            <a:schemeClr val="tx1"/>
+          </a:fontRef>
+        </p:style>
+      </p:cxnSp>
+      <p:cxnSp>
+        <p:nvCxnSpPr>
+          <p:cNvPr id="26" name="Connector 25"/>
+          <p:cNvCxnSpPr/>
+          <p:nvPr/>
+        </p:nvCxnSpPr>
+        <p:spPr>
+          <a:xfrm flipV="1">
+            <a:off x="2146300" y="1435100"/>
+            <a:ext cx="0" cy="1206500"/>
+          </a:xfrm>
+          <a:prstGeom prst="line">
+            <a:avLst/>
+          </a:prstGeom>
+          <a:ln w="12700">
+            <a:solidFill>
+              <a:srgbClr val="0072B2"/>
+            </a:solidFill>
+          </a:ln>
+        </p:spPr>
+        <p:style>
+          <a:lnRef idx="2">
+            <a:schemeClr val="accent1"/>
+          </a:lnRef>
+          <a:fillRef idx="0">
+            <a:schemeClr val="accent1"/>
+          </a:fillRef>
+          <a:effectRef idx="1">
+            <a:schemeClr val="accent1"/>
+          </a:effectRef>
+          <a:fontRef idx="minor">
+            <a:schemeClr val="tx1"/>
+          </a:fontRef>
+        </p:style>
+      </p:cxnSp>
+      <p:cxnSp>
+        <p:nvCxnSpPr>
+          <p:cNvPr id="27" name="Connector 26"/>
+          <p:cNvCxnSpPr/>
+          <p:nvPr/>
+        </p:nvCxnSpPr>
+        <p:spPr>
+          <a:xfrm>
+            <a:off x="2146300" y="1435100"/>
+            <a:ext cx="508000" cy="0"/>
+          </a:xfrm>
+          <a:prstGeom prst="line">
+            <a:avLst/>
+          </a:prstGeom>
+          <a:ln w="12700">
+            <a:solidFill>
+              <a:srgbClr val="0072B2"/>
+            </a:solidFill>
+          </a:ln>
+        </p:spPr>
+        <p:style>
+          <a:lnRef idx="2">
+            <a:schemeClr val="accent1"/>
+          </a:lnRef>
+          <a:fillRef idx="0">
+            <a:schemeClr val="accent1"/>
+          </a:fillRef>
+          <a:effectRef idx="1">
+            <a:schemeClr val="accent1"/>
+          </a:effectRef>
+          <a:fontRef idx="minor">
+            <a:schemeClr val="tx1"/>
+          </a:fontRef>
+        </p:style>
+      </p:cxnSp>
+      <p:cxnSp>
+        <p:nvCxnSpPr>
+          <p:cNvPr id="28" name="Connector 27"/>
+          <p:cNvCxnSpPr/>
+          <p:nvPr/>
+        </p:nvCxnSpPr>
+        <p:spPr>
+          <a:xfrm flipV="1">
+            <a:off x="2654300" y="1244600"/>
+            <a:ext cx="0" cy="190500"/>
+          </a:xfrm>
+          <a:prstGeom prst="line">
+            <a:avLst/>
+          </a:prstGeom>
+          <a:ln w="12700">
+            <a:solidFill>
+              <a:srgbClr val="0072B2"/>
+            </a:solidFill>
+            <a:tailEnd type="triangle" w="sm" len="sm"/>
+          </a:ln>
+        </p:spPr>
+        <p:style>
+          <a:lnRef idx="2">
+            <a:schemeClr val="accent1"/>
+          </a:lnRef>
+          <a:fillRef idx="0">
+            <a:schemeClr val="accent1"/>
+          </a:fillRef>
+          <a:effectRef idx="1">
+            <a:schemeClr val="accent1"/>
+          </a:effectRef>
+          <a:fontRef idx="minor">
+            <a:schemeClr val="tx1"/>
+          </a:fontRef>
+        </p:style>
+      </p:cxnSp>
+      <p:sp>
+        <p:nvSpPr>
+          <p:cNvPr id="29" name="TextBox 28"/>
+          <p:cNvSpPr txBox="1"/>
+          <p:nvPr/>
+        </p:nvSpPr>
+        <p:spPr>
+          <a:xfrm>
+            <a:off x="2286000" y="1562100"/>
+            <a:ext cx="1384300" cy="330200"/>
+          </a:xfrm>
+          <a:prstGeom prst="rect">
+            <a:avLst/>
+          </a:prstGeom>
+          <a:noFill/>
+        </p:spPr>
+        <p:txBody>
+          <a:bodyPr wrap="none" lIns="0" rIns="0" tIns="0" bIns="0">
+            <a:noAutofit/>
+          </a:bodyPr>
+          <a:lstStyle/>
+          <a:p>
+            <a:pPr algn="l">
+              <a:lnSpc>
+                <a:spcPts val="1188"/>
+              </a:lnSpc>
+              <a:spcBef>
+                <a:spcPts val="0"/>
+              </a:spcBef>
+              <a:spcAft>
+                <a:spcPts val="0"/>
+              </a:spcAft>
+            </a:pPr>
+            <a:r>
+              <a:rPr sz="1080" b="0" i="0">
+                <a:solidFill>
+                  <a:srgbClr val="0072B2"/>
+                </a:solidFill>
+                <a:latin typeface="Arial"/>
+              </a:rPr>
+              <a:t>Per-muscle</a:t>
+            </a:r>
+          </a:p>
+          <a:p>
+            <a:pPr algn="l">
+              <a:lnSpc>
+                <a:spcPts val="1188"/>
+              </a:lnSpc>
+              <a:spcBef>
+                <a:spcPts val="0"/>
+              </a:spcBef>
+              <a:spcAft>
+                <a:spcPts val="0"/>
+              </a:spcAft>
+            </a:pPr>
+            <a:r>
+              <a:rPr sz="1080" b="0" i="0">
+                <a:solidFill>
+                  <a:srgbClr val="0072B2"/>
+                </a:solidFill>
+                <a:latin typeface="Arial"/>
+              </a:rPr>
+              <a:t>activation</a:t>
+            </a:r>
+          </a:p>
+        </p:txBody>
+      </p:sp>
+      <p:cxnSp>
+        <p:nvCxnSpPr>
           <p:cNvPr id="30" name="Connector 29"/>
           <p:cNvCxnSpPr/>
           <p:nvPr/>
         </p:nvCxnSpPr>
         <p:spPr>
           <a:xfrm>
-            <a:off x="1602000" y="892800"/>
-            <a:ext cx="198000" cy="0"/>
+            <a:off x="3441700" y="1244600"/>
+            <a:ext cx="0" cy="177800"/>
           </a:xfrm>
           <a:prstGeom prst="line">
             <a:avLst/>
           </a:prstGeom>
           <a:ln w="12700">
             <a:solidFill>
-              <a:srgbClr val="1F1F1F"/>
+              <a:srgbClr val="243343"/>
             </a:solidFill>
-            <a:tailEnd type="triangle" w="med" len="med"/>
           </a:ln>
         </p:spPr>
         <p:style>
@@ -4434,15 +4370,15 @@
         </p:nvCxnSpPr>
         <p:spPr>
           <a:xfrm>
-            <a:off x="2736000" y="2023200"/>
-            <a:ext cx="1205999" cy="0"/>
+            <a:off x="3441700" y="1422400"/>
+            <a:ext cx="431800" cy="0"/>
           </a:xfrm>
           <a:prstGeom prst="line">
             <a:avLst/>
           </a:prstGeom>
           <a:ln w="12700">
             <a:solidFill>
-              <a:srgbClr val="1F1F1F"/>
+              <a:srgbClr val="243343"/>
             </a:solidFill>
           </a:ln>
         </p:spPr>
@@ -4468,16 +4404,16 @@
           <p:nvPr/>
         </p:nvCxnSpPr>
         <p:spPr>
-          <a:xfrm flipV="1">
-            <a:off x="3941999" y="784800"/>
-            <a:ext cx="0" cy="1238400"/>
+          <a:xfrm>
+            <a:off x="3873500" y="1422400"/>
+            <a:ext cx="0" cy="863600"/>
           </a:xfrm>
           <a:prstGeom prst="line">
             <a:avLst/>
           </a:prstGeom>
           <a:ln w="12700">
             <a:solidFill>
-              <a:srgbClr val="1F1F1F"/>
+              <a:srgbClr val="243343"/>
             </a:solidFill>
           </a:ln>
         </p:spPr>
@@ -4503,18 +4439,17 @@
           <p:nvPr/>
         </p:nvCxnSpPr>
         <p:spPr>
-          <a:xfrm>
-            <a:off x="3941999" y="784800"/>
-            <a:ext cx="234001" cy="0"/>
+          <a:xfrm flipH="1">
+            <a:off x="3327400" y="2286000"/>
+            <a:ext cx="546100" cy="0"/>
           </a:xfrm>
           <a:prstGeom prst="line">
             <a:avLst/>
           </a:prstGeom>
           <a:ln w="12700">
             <a:solidFill>
-              <a:srgbClr val="1F1F1F"/>
+              <a:srgbClr val="243343"/>
             </a:solidFill>
-            <a:tailEnd type="triangle" w="med" len="med"/>
           </a:ln>
         </p:spPr>
         <p:style>
@@ -4532,16 +4467,52 @@
           </a:fontRef>
         </p:style>
       </p:cxnSp>
-      <p:sp>
-        <p:nvSpPr>
-          <p:cNvPr id="34" name="TextBox 33"/>
+      <p:cxnSp>
+        <p:nvCxnSpPr>
+          <p:cNvPr id="34" name="Connector 33"/>
+          <p:cNvCxnSpPr/>
+          <p:nvPr/>
+        </p:nvCxnSpPr>
+        <p:spPr>
+          <a:xfrm>
+            <a:off x="3327400" y="2286000"/>
+            <a:ext cx="0" cy="88900"/>
+          </a:xfrm>
+          <a:prstGeom prst="line">
+            <a:avLst/>
+          </a:prstGeom>
+          <a:ln w="12700">
+            <a:solidFill>
+              <a:srgbClr val="243343"/>
+            </a:solidFill>
+            <a:tailEnd type="triangle" w="sm" len="sm"/>
+          </a:ln>
+        </p:spPr>
+        <p:style>
+          <a:lnRef idx="2">
+            <a:schemeClr val="accent1"/>
+          </a:lnRef>
+          <a:fillRef idx="0">
+            <a:schemeClr val="accent1"/>
+          </a:fillRef>
+          <a:effectRef idx="1">
+            <a:schemeClr val="accent1"/>
+          </a:effectRef>
+          <a:fontRef idx="minor">
+            <a:schemeClr val="tx1"/>
+          </a:fontRef>
+        </p:style>
+      </p:cxnSp>
+      <p:sp>
+        <p:nvSpPr>
+          <p:cNvPr id="35" name="TextBox 34"/>
           <p:cNvSpPr txBox="1"/>
           <p:nvPr/>
         </p:nvSpPr>
         <p:spPr>
           <a:xfrm>
-            <a:off x="108000" y="2628000"/>
-            <a:ext cx="5976000" cy="270000"/>
+            <a:off x="2336800" y="1943100"/>
+            <a:ext cx="1397000" cy="355600"/>
           </a:xfrm>
           <a:prstGeom prst="rect">
             <a:avLst/>
@@ -4549,32 +4520,1034 @@
           <a:noFill/>
         </p:spPr>
         <p:txBody>
-          <a:bodyPr wrap="square" lIns="10800" rIns="10800" tIns="3600" bIns="3600">
-            <a:spAutoFit/>
+          <a:bodyPr wrap="none" lIns="0" rIns="0" tIns="0" bIns="0">
+            <a:noAutofit/>
           </a:bodyPr>
           <a:lstStyle/>
           <a:p>
-            <a:pPr algn="ctr"/>
-            <a:r>
-              <a:rPr sz="1000" b="0">
+            <a:pPr algn="l">
+              <a:lnSpc>
+                <a:spcPts val="1188"/>
+              </a:lnSpc>
+              <a:spcBef>
+                <a:spcPts val="0"/>
+              </a:spcBef>
+              <a:spcAft>
+                <a:spcPts val="0"/>
+              </a:spcAft>
+            </a:pPr>
+            <a:r>
+              <a:rPr sz="1080" b="0" i="0">
                 <a:solidFill>
-                  <a:srgbClr val="1F1F1F"/>
+                  <a:srgbClr val="243343"/>
                 </a:solidFill>
                 <a:latin typeface="Arial"/>
               </a:rPr>
-              <a:t>Computer-in-the-loop: the embedded stack first executes against</a:t>
-            </a:r>
-          </a:p>
-          <a:p>
-            <a:pPr algn="ctr"/>
-            <a:r>
-              <a:rPr sz="1000" b="0">
+              <a:t>Ia, Ib, II, and</a:t>
+            </a:r>
+          </a:p>
+          <a:p>
+            <a:pPr algn="l">
+              <a:lnSpc>
+                <a:spcPts val="1188"/>
+              </a:lnSpc>
+              <a:spcBef>
+                <a:spcPts val="0"/>
+              </a:spcBef>
+              <a:spcAft>
+                <a:spcPts val="0"/>
+              </a:spcAft>
+            </a:pPr>
+            <a:r>
+              <a:rPr sz="1080" b="0" i="0">
                 <a:solidFill>
-                  <a:srgbClr val="1F1F1F"/>
+                  <a:srgbClr val="243343"/>
                 </a:solidFill>
                 <a:latin typeface="Arial"/>
               </a:rPr>
-              <a:t>the simulated body, then against the physical one.</a:t>
+              <a:t>contact feedback</a:t>
+            </a:r>
+          </a:p>
+        </p:txBody>
+      </p:sp>
+      <p:sp>
+        <p:nvSpPr>
+          <p:cNvPr id="36" name="Rectangle 35"/>
+          <p:cNvSpPr/>
+          <p:nvPr/>
+        </p:nvSpPr>
+        <p:spPr>
+          <a:xfrm>
+            <a:off x="4356100" y="508000"/>
+            <a:ext cx="1308100" cy="571500"/>
+          </a:xfrm>
+          <a:prstGeom prst="rect">
+            <a:avLst/>
+          </a:prstGeom>
+          <a:solidFill>
+            <a:srgbClr val="F1F5F8"/>
+          </a:solidFill>
+          <a:ln w="12700">
+            <a:solidFill>
+              <a:srgbClr val="243343"/>
+            </a:solidFill>
+            <a:prstDash val="dash"/>
+          </a:ln>
+        </p:spPr>
+        <p:style>
+          <a:lnRef idx="1">
+            <a:schemeClr val="accent1"/>
+          </a:lnRef>
+          <a:fillRef idx="3">
+            <a:schemeClr val="accent1"/>
+          </a:fillRef>
+          <a:effectRef idx="2">
+            <a:schemeClr val="accent1"/>
+          </a:effectRef>
+          <a:fontRef idx="minor">
+            <a:schemeClr val="lt1"/>
+          </a:fontRef>
+        </p:style>
+        <p:txBody>
+          <a:bodyPr rtlCol="0" anchor="ctr"/>
+          <a:lstStyle/>
+          <a:p>
+            <a:pPr algn="ctr"/>
+          </a:p>
+        </p:txBody>
+      </p:sp>
+      <p:sp>
+        <p:nvSpPr>
+          <p:cNvPr id="37" name="TextBox 36"/>
+          <p:cNvSpPr txBox="1"/>
+          <p:nvPr/>
+        </p:nvSpPr>
+        <p:spPr>
+          <a:xfrm>
+            <a:off x="4445000" y="614680"/>
+            <a:ext cx="1130300" cy="160654"/>
+          </a:xfrm>
+          <a:prstGeom prst="rect">
+            <a:avLst/>
+          </a:prstGeom>
+          <a:noFill/>
+        </p:spPr>
+        <p:txBody>
+          <a:bodyPr wrap="none" lIns="0" rIns="0" tIns="0" bIns="0">
+            <a:noAutofit/>
+          </a:bodyPr>
+          <a:lstStyle/>
+          <a:p>
+            <a:pPr algn="ctr">
+              <a:lnSpc>
+                <a:spcPts val="1210"/>
+              </a:lnSpc>
+              <a:spcBef>
+                <a:spcPts val="0"/>
+              </a:spcBef>
+              <a:spcAft>
+                <a:spcPts val="0"/>
+              </a:spcAft>
+            </a:pPr>
+            <a:r>
+              <a:rPr sz="1100" b="1" i="0">
+                <a:solidFill>
+                  <a:srgbClr val="243343"/>
+                </a:solidFill>
+                <a:latin typeface="Arial"/>
+              </a:rPr>
+              <a:t>Jetson Orin</a:t>
+            </a:r>
+          </a:p>
+        </p:txBody>
+      </p:sp>
+      <p:sp>
+        <p:nvSpPr>
+          <p:cNvPr id="38" name="TextBox 37"/>
+          <p:cNvSpPr txBox="1"/>
+          <p:nvPr/>
+        </p:nvSpPr>
+        <p:spPr>
+          <a:xfrm>
+            <a:off x="4445000" y="831850"/>
+            <a:ext cx="1130300" cy="162052"/>
+          </a:xfrm>
+          <a:prstGeom prst="rect">
+            <a:avLst/>
+          </a:prstGeom>
+          <a:noFill/>
+        </p:spPr>
+        <p:txBody>
+          <a:bodyPr wrap="none" lIns="0" rIns="0" tIns="0" bIns="0">
+            <a:noAutofit/>
+          </a:bodyPr>
+          <a:lstStyle/>
+          <a:p>
+            <a:pPr algn="ctr">
+              <a:lnSpc>
+                <a:spcPts val="1210"/>
+              </a:lnSpc>
+              <a:spcBef>
+                <a:spcPts val="0"/>
+              </a:spcBef>
+              <a:spcAft>
+                <a:spcPts val="0"/>
+              </a:spcAft>
+            </a:pPr>
+            <a:r>
+              <a:rPr sz="1100" b="0" i="0">
+                <a:solidFill>
+                  <a:srgbClr val="243343"/>
+                </a:solidFill>
+                <a:latin typeface="Arial"/>
+              </a:rPr>
+              <a:t>SNS evaluation</a:t>
+            </a:r>
+          </a:p>
+        </p:txBody>
+      </p:sp>
+      <p:sp>
+        <p:nvSpPr>
+          <p:cNvPr id="39" name="Rectangle 38"/>
+          <p:cNvSpPr/>
+          <p:nvPr/>
+        </p:nvSpPr>
+        <p:spPr>
+          <a:xfrm>
+            <a:off x="4356100" y="1549400"/>
+            <a:ext cx="1308100" cy="635000"/>
+          </a:xfrm>
+          <a:prstGeom prst="rect">
+            <a:avLst/>
+          </a:prstGeom>
+          <a:solidFill>
+            <a:srgbClr val="F1F5F8"/>
+          </a:solidFill>
+          <a:ln w="12700">
+            <a:solidFill>
+              <a:srgbClr val="243343"/>
+            </a:solidFill>
+            <a:prstDash val="dash"/>
+          </a:ln>
+        </p:spPr>
+        <p:style>
+          <a:lnRef idx="1">
+            <a:schemeClr val="accent1"/>
+          </a:lnRef>
+          <a:fillRef idx="3">
+            <a:schemeClr val="accent1"/>
+          </a:fillRef>
+          <a:effectRef idx="2">
+            <a:schemeClr val="accent1"/>
+          </a:effectRef>
+          <a:fontRef idx="minor">
+            <a:schemeClr val="lt1"/>
+          </a:fontRef>
+        </p:style>
+        <p:txBody>
+          <a:bodyPr rtlCol="0" anchor="ctr"/>
+          <a:lstStyle/>
+          <a:p>
+            <a:pPr algn="ctr"/>
+          </a:p>
+        </p:txBody>
+      </p:sp>
+      <p:sp>
+        <p:nvSpPr>
+          <p:cNvPr id="40" name="TextBox 39"/>
+          <p:cNvSpPr txBox="1"/>
+          <p:nvPr/>
+        </p:nvSpPr>
+        <p:spPr>
+          <a:xfrm>
+            <a:off x="4445000" y="1610995"/>
+            <a:ext cx="1130300" cy="160654"/>
+          </a:xfrm>
+          <a:prstGeom prst="rect">
+            <a:avLst/>
+          </a:prstGeom>
+          <a:noFill/>
+        </p:spPr>
+        <p:txBody>
+          <a:bodyPr wrap="none" lIns="0" rIns="0" tIns="0" bIns="0">
+            <a:noAutofit/>
+          </a:bodyPr>
+          <a:lstStyle/>
+          <a:p>
+            <a:pPr algn="ctr">
+              <a:lnSpc>
+                <a:spcPts val="1210"/>
+              </a:lnSpc>
+              <a:spcBef>
+                <a:spcPts val="0"/>
+              </a:spcBef>
+              <a:spcAft>
+                <a:spcPts val="0"/>
+              </a:spcAft>
+            </a:pPr>
+            <a:r>
+              <a:rPr sz="1100" b="1" i="0">
+                <a:solidFill>
+                  <a:srgbClr val="243343"/>
+                </a:solidFill>
+                <a:latin typeface="Arial"/>
+              </a:rPr>
+              <a:t>Joint controllers</a:t>
+            </a:r>
+          </a:p>
+        </p:txBody>
+      </p:sp>
+      <p:sp>
+        <p:nvSpPr>
+          <p:cNvPr id="41" name="TextBox 40"/>
+          <p:cNvSpPr txBox="1"/>
+          <p:nvPr/>
+        </p:nvSpPr>
+        <p:spPr>
+          <a:xfrm>
+            <a:off x="4445000" y="1828164"/>
+            <a:ext cx="1130300" cy="324104"/>
+          </a:xfrm>
+          <a:prstGeom prst="rect">
+            <a:avLst/>
+          </a:prstGeom>
+          <a:noFill/>
+        </p:spPr>
+        <p:txBody>
+          <a:bodyPr wrap="none" lIns="0" rIns="0" tIns="0" bIns="0">
+            <a:noAutofit/>
+          </a:bodyPr>
+          <a:lstStyle/>
+          <a:p>
+            <a:pPr algn="ctr">
+              <a:lnSpc>
+                <a:spcPts val="1210"/>
+              </a:lnSpc>
+              <a:spcBef>
+                <a:spcPts val="0"/>
+              </a:spcBef>
+              <a:spcAft>
+                <a:spcPts val="0"/>
+              </a:spcAft>
+            </a:pPr>
+            <a:r>
+              <a:rPr sz="1100" b="0" i="0">
+                <a:solidFill>
+                  <a:srgbClr val="243343"/>
+                </a:solidFill>
+                <a:latin typeface="Arial"/>
+              </a:rPr>
+              <a:t>Valves, pressure,</a:t>
+            </a:r>
+          </a:p>
+          <a:p>
+            <a:pPr algn="ctr">
+              <a:lnSpc>
+                <a:spcPts val="1210"/>
+              </a:lnSpc>
+              <a:spcBef>
+                <a:spcPts val="0"/>
+              </a:spcBef>
+              <a:spcAft>
+                <a:spcPts val="0"/>
+              </a:spcAft>
+            </a:pPr>
+            <a:r>
+              <a:rPr sz="1100" b="0" i="0">
+                <a:solidFill>
+                  <a:srgbClr val="243343"/>
+                </a:solidFill>
+                <a:latin typeface="Arial"/>
+              </a:rPr>
+              <a:t>and contact</a:t>
+            </a:r>
+          </a:p>
+        </p:txBody>
+      </p:sp>
+      <p:sp>
+        <p:nvSpPr>
+          <p:cNvPr id="42" name="Rectangle 41"/>
+          <p:cNvSpPr/>
+          <p:nvPr/>
+        </p:nvSpPr>
+        <p:spPr>
+          <a:xfrm>
+            <a:off x="4356100" y="2667000"/>
+            <a:ext cx="1308100" cy="381000"/>
+          </a:xfrm>
+          <a:prstGeom prst="rect">
+            <a:avLst/>
+          </a:prstGeom>
+          <a:solidFill>
+            <a:srgbClr val="F1F5F8"/>
+          </a:solidFill>
+          <a:ln w="12700">
+            <a:solidFill>
+              <a:srgbClr val="243343"/>
+            </a:solidFill>
+            <a:prstDash val="dash"/>
+          </a:ln>
+        </p:spPr>
+        <p:style>
+          <a:lnRef idx="1">
+            <a:schemeClr val="accent1"/>
+          </a:lnRef>
+          <a:fillRef idx="3">
+            <a:schemeClr val="accent1"/>
+          </a:fillRef>
+          <a:effectRef idx="2">
+            <a:schemeClr val="accent1"/>
+          </a:effectRef>
+          <a:fontRef idx="minor">
+            <a:schemeClr val="lt1"/>
+          </a:fontRef>
+        </p:style>
+        <p:txBody>
+          <a:bodyPr rtlCol="0" anchor="ctr"/>
+          <a:lstStyle/>
+          <a:p>
+            <a:pPr algn="ctr"/>
+          </a:p>
+        </p:txBody>
+      </p:sp>
+      <p:sp>
+        <p:nvSpPr>
+          <p:cNvPr id="43" name="TextBox 42"/>
+          <p:cNvSpPr txBox="1"/>
+          <p:nvPr/>
+        </p:nvSpPr>
+        <p:spPr>
+          <a:xfrm>
+            <a:off x="4445000" y="2780665"/>
+            <a:ext cx="1130300" cy="279400"/>
+          </a:xfrm>
+          <a:prstGeom prst="rect">
+            <a:avLst/>
+          </a:prstGeom>
+          <a:noFill/>
+        </p:spPr>
+        <p:txBody>
+          <a:bodyPr wrap="none" lIns="0" rIns="0" tIns="0" bIns="0">
+            <a:noAutofit/>
+          </a:bodyPr>
+          <a:lstStyle/>
+          <a:p>
+            <a:pPr algn="ctr">
+              <a:lnSpc>
+                <a:spcPts val="1210"/>
+              </a:lnSpc>
+              <a:spcBef>
+                <a:spcPts val="0"/>
+              </a:spcBef>
+              <a:spcAft>
+                <a:spcPts val="0"/>
+              </a:spcAft>
+            </a:pPr>
+            <a:r>
+              <a:rPr sz="1100" b="0" i="0">
+                <a:solidFill>
+                  <a:srgbClr val="243343"/>
+                </a:solidFill>
+                <a:latin typeface="Arial"/>
+              </a:rPr>
+              <a:t>Treadmill biped</a:t>
+            </a:r>
+          </a:p>
+        </p:txBody>
+      </p:sp>
+      <p:cxnSp>
+        <p:nvCxnSpPr>
+          <p:cNvPr id="44" name="Connector 43"/>
+          <p:cNvCxnSpPr/>
+          <p:nvPr/>
+        </p:nvCxnSpPr>
+        <p:spPr>
+          <a:xfrm>
+            <a:off x="5016500" y="1079500"/>
+            <a:ext cx="0" cy="469900"/>
+          </a:xfrm>
+          <a:prstGeom prst="line">
+            <a:avLst/>
+          </a:prstGeom>
+          <a:ln w="12700">
+            <a:solidFill>
+              <a:srgbClr val="243343"/>
+            </a:solidFill>
+            <a:tailEnd type="triangle" w="sm" len="sm"/>
+          </a:ln>
+        </p:spPr>
+        <p:style>
+          <a:lnRef idx="2">
+            <a:schemeClr val="accent1"/>
+          </a:lnRef>
+          <a:fillRef idx="0">
+            <a:schemeClr val="accent1"/>
+          </a:fillRef>
+          <a:effectRef idx="1">
+            <a:schemeClr val="accent1"/>
+          </a:effectRef>
+          <a:fontRef idx="minor">
+            <a:schemeClr val="tx1"/>
+          </a:fontRef>
+        </p:style>
+      </p:cxnSp>
+      <p:cxnSp>
+        <p:nvCxnSpPr>
+          <p:cNvPr id="45" name="Connector 44"/>
+          <p:cNvCxnSpPr/>
+          <p:nvPr/>
+        </p:nvCxnSpPr>
+        <p:spPr>
+          <a:xfrm>
+            <a:off x="5016500" y="2184400"/>
+            <a:ext cx="0" cy="482600"/>
+          </a:xfrm>
+          <a:prstGeom prst="line">
+            <a:avLst/>
+          </a:prstGeom>
+          <a:ln w="12700">
+            <a:solidFill>
+              <a:srgbClr val="243343"/>
+            </a:solidFill>
+            <a:tailEnd type="triangle" w="sm" len="sm"/>
+          </a:ln>
+        </p:spPr>
+        <p:style>
+          <a:lnRef idx="2">
+            <a:schemeClr val="accent1"/>
+          </a:lnRef>
+          <a:fillRef idx="0">
+            <a:schemeClr val="accent1"/>
+          </a:fillRef>
+          <a:effectRef idx="1">
+            <a:schemeClr val="accent1"/>
+          </a:effectRef>
+          <a:fontRef idx="minor">
+            <a:schemeClr val="tx1"/>
+          </a:fontRef>
+        </p:style>
+      </p:cxnSp>
+      <p:sp>
+        <p:nvSpPr>
+          <p:cNvPr id="46" name="TextBox 45"/>
+          <p:cNvSpPr txBox="1"/>
+          <p:nvPr/>
+        </p:nvSpPr>
+        <p:spPr>
+          <a:xfrm>
+            <a:off x="4356100" y="1143000"/>
+            <a:ext cx="533400" cy="330200"/>
+          </a:xfrm>
+          <a:prstGeom prst="rect">
+            <a:avLst/>
+          </a:prstGeom>
+          <a:noFill/>
+        </p:spPr>
+        <p:txBody>
+          <a:bodyPr wrap="none" lIns="0" rIns="0" tIns="0" bIns="0">
+            <a:noAutofit/>
+          </a:bodyPr>
+          <a:lstStyle/>
+          <a:p>
+            <a:pPr algn="ctr">
+              <a:lnSpc>
+                <a:spcPts val="1188"/>
+              </a:lnSpc>
+              <a:spcBef>
+                <a:spcPts val="0"/>
+              </a:spcBef>
+              <a:spcAft>
+                <a:spcPts val="0"/>
+              </a:spcAft>
+            </a:pPr>
+            <a:r>
+              <a:rPr sz="1080" b="0" i="0">
+                <a:solidFill>
+                  <a:srgbClr val="243343"/>
+                </a:solidFill>
+                <a:latin typeface="Arial"/>
+              </a:rPr>
+              <a:t>SNS</a:t>
+            </a:r>
+          </a:p>
+          <a:p>
+            <a:pPr algn="ctr">
+              <a:lnSpc>
+                <a:spcPts val="1188"/>
+              </a:lnSpc>
+              <a:spcBef>
+                <a:spcPts val="0"/>
+              </a:spcBef>
+              <a:spcAft>
+                <a:spcPts val="0"/>
+              </a:spcAft>
+            </a:pPr>
+            <a:r>
+              <a:rPr sz="1080" b="0" i="0">
+                <a:solidFill>
+                  <a:srgbClr val="243343"/>
+                </a:solidFill>
+                <a:latin typeface="Arial"/>
+              </a:rPr>
+              <a:t>output</a:t>
+            </a:r>
+          </a:p>
+        </p:txBody>
+      </p:sp>
+      <p:sp>
+        <p:nvSpPr>
+          <p:cNvPr id="47" name="TextBox 46"/>
+          <p:cNvSpPr txBox="1"/>
+          <p:nvPr/>
+        </p:nvSpPr>
+        <p:spPr>
+          <a:xfrm>
+            <a:off x="4318000" y="2260600"/>
+            <a:ext cx="584200" cy="330200"/>
+          </a:xfrm>
+          <a:prstGeom prst="rect">
+            <a:avLst/>
+          </a:prstGeom>
+          <a:noFill/>
+        </p:spPr>
+        <p:txBody>
+          <a:bodyPr wrap="none" lIns="0" rIns="0" tIns="0" bIns="0">
+            <a:noAutofit/>
+          </a:bodyPr>
+          <a:lstStyle/>
+          <a:p>
+            <a:pPr algn="ctr">
+              <a:lnSpc>
+                <a:spcPts val="1188"/>
+              </a:lnSpc>
+              <a:spcBef>
+                <a:spcPts val="0"/>
+              </a:spcBef>
+              <a:spcAft>
+                <a:spcPts val="0"/>
+              </a:spcAft>
+            </a:pPr>
+            <a:r>
+              <a:rPr sz="1080" b="0" i="0">
+                <a:solidFill>
+                  <a:srgbClr val="243343"/>
+                </a:solidFill>
+                <a:latin typeface="Arial"/>
+              </a:rPr>
+              <a:t>Valve</a:t>
+            </a:r>
+          </a:p>
+          <a:p>
+            <a:pPr algn="ctr">
+              <a:lnSpc>
+                <a:spcPts val="1188"/>
+              </a:lnSpc>
+              <a:spcBef>
+                <a:spcPts val="0"/>
+              </a:spcBef>
+              <a:spcAft>
+                <a:spcPts val="0"/>
+              </a:spcAft>
+            </a:pPr>
+            <a:r>
+              <a:rPr sz="1080" b="0" i="0">
+                <a:solidFill>
+                  <a:srgbClr val="243343"/>
+                </a:solidFill>
+                <a:latin typeface="Arial"/>
+              </a:rPr>
+              <a:t>drive</a:t>
+            </a:r>
+          </a:p>
+        </p:txBody>
+      </p:sp>
+      <p:cxnSp>
+        <p:nvCxnSpPr>
+          <p:cNvPr id="48" name="Connector 47"/>
+          <p:cNvCxnSpPr/>
+          <p:nvPr/>
+        </p:nvCxnSpPr>
+        <p:spPr>
+          <a:xfrm>
+            <a:off x="5664200" y="2857500"/>
+            <a:ext cx="76200" cy="0"/>
+          </a:xfrm>
+          <a:prstGeom prst="line">
+            <a:avLst/>
+          </a:prstGeom>
+          <a:ln w="12700">
+            <a:solidFill>
+              <a:srgbClr val="6C7680"/>
+            </a:solidFill>
+          </a:ln>
+        </p:spPr>
+        <p:style>
+          <a:lnRef idx="2">
+            <a:schemeClr val="accent1"/>
+          </a:lnRef>
+          <a:fillRef idx="0">
+            <a:schemeClr val="accent1"/>
+          </a:fillRef>
+          <a:effectRef idx="1">
+            <a:schemeClr val="accent1"/>
+          </a:effectRef>
+          <a:fontRef idx="minor">
+            <a:schemeClr val="tx1"/>
+          </a:fontRef>
+        </p:style>
+      </p:cxnSp>
+      <p:cxnSp>
+        <p:nvCxnSpPr>
+          <p:cNvPr id="49" name="Connector 48"/>
+          <p:cNvCxnSpPr/>
+          <p:nvPr/>
+        </p:nvCxnSpPr>
+        <p:spPr>
+          <a:xfrm flipV="1">
+            <a:off x="5740400" y="1854200"/>
+            <a:ext cx="0" cy="1003300"/>
+          </a:xfrm>
+          <a:prstGeom prst="line">
+            <a:avLst/>
+          </a:prstGeom>
+          <a:ln w="12700">
+            <a:solidFill>
+              <a:srgbClr val="6C7680"/>
+            </a:solidFill>
+          </a:ln>
+        </p:spPr>
+        <p:style>
+          <a:lnRef idx="2">
+            <a:schemeClr val="accent1"/>
+          </a:lnRef>
+          <a:fillRef idx="0">
+            <a:schemeClr val="accent1"/>
+          </a:fillRef>
+          <a:effectRef idx="1">
+            <a:schemeClr val="accent1"/>
+          </a:effectRef>
+          <a:fontRef idx="minor">
+            <a:schemeClr val="tx1"/>
+          </a:fontRef>
+        </p:style>
+      </p:cxnSp>
+      <p:cxnSp>
+        <p:nvCxnSpPr>
+          <p:cNvPr id="50" name="Connector 49"/>
+          <p:cNvCxnSpPr/>
+          <p:nvPr/>
+        </p:nvCxnSpPr>
+        <p:spPr>
+          <a:xfrm flipH="1">
+            <a:off x="5664200" y="1854200"/>
+            <a:ext cx="76200" cy="0"/>
+          </a:xfrm>
+          <a:prstGeom prst="line">
+            <a:avLst/>
+          </a:prstGeom>
+          <a:ln w="12700">
+            <a:solidFill>
+              <a:srgbClr val="6C7680"/>
+            </a:solidFill>
+            <a:tailEnd type="triangle" w="sm" len="sm"/>
+          </a:ln>
+        </p:spPr>
+        <p:style>
+          <a:lnRef idx="2">
+            <a:schemeClr val="accent1"/>
+          </a:lnRef>
+          <a:fillRef idx="0">
+            <a:schemeClr val="accent1"/>
+          </a:fillRef>
+          <a:effectRef idx="1">
+            <a:schemeClr val="accent1"/>
+          </a:effectRef>
+          <a:fontRef idx="minor">
+            <a:schemeClr val="tx1"/>
+          </a:fontRef>
+        </p:style>
+      </p:cxnSp>
+      <p:cxnSp>
+        <p:nvCxnSpPr>
+          <p:cNvPr id="51" name="Connector 50"/>
+          <p:cNvCxnSpPr/>
+          <p:nvPr/>
+        </p:nvCxnSpPr>
+        <p:spPr>
+          <a:xfrm flipH="1">
+            <a:off x="4254500" y="1727200"/>
+            <a:ext cx="101600" cy="0"/>
+          </a:xfrm>
+          <a:prstGeom prst="line">
+            <a:avLst/>
+          </a:prstGeom>
+          <a:ln w="12700">
+            <a:solidFill>
+              <a:srgbClr val="6C7680"/>
+            </a:solidFill>
+            <a:prstDash val="dash"/>
+          </a:ln>
+        </p:spPr>
+        <p:style>
+          <a:lnRef idx="2">
+            <a:schemeClr val="accent1"/>
+          </a:lnRef>
+          <a:fillRef idx="0">
+            <a:schemeClr val="accent1"/>
+          </a:fillRef>
+          <a:effectRef idx="1">
+            <a:schemeClr val="accent1"/>
+          </a:effectRef>
+          <a:fontRef idx="minor">
+            <a:schemeClr val="tx1"/>
+          </a:fontRef>
+        </p:style>
+      </p:cxnSp>
+      <p:cxnSp>
+        <p:nvCxnSpPr>
+          <p:cNvPr id="52" name="Connector 51"/>
+          <p:cNvCxnSpPr/>
+          <p:nvPr/>
+        </p:nvCxnSpPr>
+        <p:spPr>
+          <a:xfrm flipV="1">
+            <a:off x="4254500" y="800100"/>
+            <a:ext cx="0" cy="927100"/>
+          </a:xfrm>
+          <a:prstGeom prst="line">
+            <a:avLst/>
+          </a:prstGeom>
+          <a:ln w="12700">
+            <a:solidFill>
+              <a:srgbClr val="6C7680"/>
+            </a:solidFill>
+            <a:prstDash val="dash"/>
+          </a:ln>
+        </p:spPr>
+        <p:style>
+          <a:lnRef idx="2">
+            <a:schemeClr val="accent1"/>
+          </a:lnRef>
+          <a:fillRef idx="0">
+            <a:schemeClr val="accent1"/>
+          </a:fillRef>
+          <a:effectRef idx="1">
+            <a:schemeClr val="accent1"/>
+          </a:effectRef>
+          <a:fontRef idx="minor">
+            <a:schemeClr val="tx1"/>
+          </a:fontRef>
+        </p:style>
+      </p:cxnSp>
+      <p:cxnSp>
+        <p:nvCxnSpPr>
+          <p:cNvPr id="53" name="Connector 52"/>
+          <p:cNvCxnSpPr/>
+          <p:nvPr/>
+        </p:nvCxnSpPr>
+        <p:spPr>
+          <a:xfrm>
+            <a:off x="4254500" y="800100"/>
+            <a:ext cx="101600" cy="0"/>
+          </a:xfrm>
+          <a:prstGeom prst="line">
+            <a:avLst/>
+          </a:prstGeom>
+          <a:ln w="12700">
+            <a:solidFill>
+              <a:srgbClr val="6C7680"/>
+            </a:solidFill>
+            <a:prstDash val="dash"/>
+            <a:tailEnd type="triangle" w="sm" len="sm"/>
+          </a:ln>
+        </p:spPr>
+        <p:style>
+          <a:lnRef idx="2">
+            <a:schemeClr val="accent1"/>
+          </a:lnRef>
+          <a:fillRef idx="0">
+            <a:schemeClr val="accent1"/>
+          </a:fillRef>
+          <a:effectRef idx="1">
+            <a:schemeClr val="accent1"/>
+          </a:effectRef>
+          <a:fontRef idx="minor">
+            <a:schemeClr val="tx1"/>
+          </a:fontRef>
+        </p:style>
+      </p:cxnSp>
+      <p:cxnSp>
+        <p:nvCxnSpPr>
+          <p:cNvPr id="54" name="Connector 53"/>
+          <p:cNvCxnSpPr/>
+          <p:nvPr/>
+        </p:nvCxnSpPr>
+        <p:spPr>
+          <a:xfrm>
+            <a:off x="3657600" y="2641600"/>
+            <a:ext cx="431800" cy="0"/>
+          </a:xfrm>
+          <a:prstGeom prst="line">
+            <a:avLst/>
+          </a:prstGeom>
+          <a:ln w="12700">
+            <a:solidFill>
+              <a:srgbClr val="243343"/>
+            </a:solidFill>
+            <a:prstDash val="dash"/>
+          </a:ln>
+        </p:spPr>
+        <p:style>
+          <a:lnRef idx="2">
+            <a:schemeClr val="accent1"/>
+          </a:lnRef>
+          <a:fillRef idx="0">
+            <a:schemeClr val="accent1"/>
+          </a:fillRef>
+          <a:effectRef idx="1">
+            <a:schemeClr val="accent1"/>
+          </a:effectRef>
+          <a:fontRef idx="minor">
+            <a:schemeClr val="tx1"/>
+          </a:fontRef>
+        </p:style>
+      </p:cxnSp>
+      <p:cxnSp>
+        <p:nvCxnSpPr>
+          <p:cNvPr id="55" name="Connector 54"/>
+          <p:cNvCxnSpPr/>
+          <p:nvPr/>
+        </p:nvCxnSpPr>
+        <p:spPr>
+          <a:xfrm flipV="1">
+            <a:off x="4089400" y="787400"/>
+            <a:ext cx="0" cy="1854200"/>
+          </a:xfrm>
+          <a:prstGeom prst="line">
+            <a:avLst/>
+          </a:prstGeom>
+          <a:ln w="12700">
+            <a:solidFill>
+              <a:srgbClr val="243343"/>
+            </a:solidFill>
+            <a:prstDash val="dash"/>
+          </a:ln>
+        </p:spPr>
+        <p:style>
+          <a:lnRef idx="2">
+            <a:schemeClr val="accent1"/>
+          </a:lnRef>
+          <a:fillRef idx="0">
+            <a:schemeClr val="accent1"/>
+          </a:fillRef>
+          <a:effectRef idx="1">
+            <a:schemeClr val="accent1"/>
+          </a:effectRef>
+          <a:fontRef idx="minor">
+            <a:schemeClr val="tx1"/>
+          </a:fontRef>
+        </p:style>
+      </p:cxnSp>
+      <p:cxnSp>
+        <p:nvCxnSpPr>
+          <p:cNvPr id="56" name="Connector 55"/>
+          <p:cNvCxnSpPr/>
+          <p:nvPr/>
+        </p:nvCxnSpPr>
+        <p:spPr>
+          <a:xfrm>
+            <a:off x="4089400" y="787400"/>
+            <a:ext cx="266700" cy="0"/>
+          </a:xfrm>
+          <a:prstGeom prst="line">
+            <a:avLst/>
+          </a:prstGeom>
+          <a:ln w="12700">
+            <a:solidFill>
+              <a:srgbClr val="243343"/>
+            </a:solidFill>
+            <a:prstDash val="dash"/>
+            <a:tailEnd type="triangle" w="sm" len="sm"/>
+          </a:ln>
+        </p:spPr>
+        <p:style>
+          <a:lnRef idx="2">
+            <a:schemeClr val="accent1"/>
+          </a:lnRef>
+          <a:fillRef idx="0">
+            <a:schemeClr val="accent1"/>
+          </a:fillRef>
+          <a:effectRef idx="1">
+            <a:schemeClr val="accent1"/>
+          </a:effectRef>
+          <a:fontRef idx="minor">
+            <a:schemeClr val="tx1"/>
+          </a:fontRef>
+        </p:style>
+      </p:cxnSp>
+      <p:sp>
+        <p:nvSpPr>
+          <p:cNvPr id="57" name="TextBox 56"/>
+          <p:cNvSpPr txBox="1"/>
+          <p:nvPr/>
+        </p:nvSpPr>
+        <p:spPr>
+          <a:xfrm>
+            <a:off x="165100" y="3403600"/>
+            <a:ext cx="5613400" cy="368300"/>
+          </a:xfrm>
+          <a:prstGeom prst="rect">
+            <a:avLst/>
+          </a:prstGeom>
+          <a:noFill/>
+        </p:spPr>
+        <p:txBody>
+          <a:bodyPr wrap="none" lIns="0" rIns="0" tIns="0" bIns="0">
+            <a:noAutofit/>
+          </a:bodyPr>
+          <a:lstStyle/>
+          <a:p>
+            <a:pPr algn="ctr">
+              <a:lnSpc>
+                <a:spcPts val="1188"/>
+              </a:lnSpc>
+              <a:spcBef>
+                <a:spcPts val="0"/>
+              </a:spcBef>
+              <a:spcAft>
+                <a:spcPts val="0"/>
+              </a:spcAft>
+            </a:pPr>
+            <a:r>
+              <a:rPr sz="1080" b="0" i="0">
+                <a:solidFill>
+                  <a:srgbClr val="243343"/>
+                </a:solidFill>
+                <a:latin typeface="Arial"/>
+              </a:rPr>
+              <a:t>Computer-in-the-loop: test embedded control against the simulated body</a:t>
+            </a:r>
+          </a:p>
+          <a:p>
+            <a:pPr algn="ctr">
+              <a:lnSpc>
+                <a:spcPts val="1188"/>
+              </a:lnSpc>
+              <a:spcBef>
+                <a:spcPts val="0"/>
+              </a:spcBef>
+              <a:spcAft>
+                <a:spcPts val="0"/>
+              </a:spcAft>
+            </a:pPr>
+            <a:r>
+              <a:rPr sz="1080" b="0" i="0">
+                <a:solidFill>
+                  <a:srgbClr val="243343"/>
+                </a:solidFill>
+                <a:latin typeface="Arial"/>
+              </a:rPr>
+              <a:t>before transfer to the physical robot.</a:t>
             </a:r>
           </a:p>
         </p:txBody>
